--- a/docs/2026-2/cea055-estatistica-probabilidade/09-modelos-discretos-i/arquivos/Aula_09_Modelos_Discretos_I_SITE.pptx
+++ b/docs/2026-2/cea055-estatistica-probabilidade/09-modelos-discretos-i/arquivos/Aula_09_Modelos_Discretos_I_SITE.pptx
@@ -5,7 +5,7 @@
     <p:sldMasterId id="2147483648" r:id="rId1"/>
   </p:sldMasterIdLst>
   <p:notesMasterIdLst>
-    <p:notesMasterId r:id="rId28"/>
+    <p:notesMasterId r:id="rId24"/>
   </p:notesMasterIdLst>
   <p:sldIdLst>
     <p:sldId id="902" r:id="rId2"/>
@@ -13,23 +13,23 @@
     <p:sldId id="904" r:id="rId4"/>
     <p:sldId id="922" r:id="rId5"/>
     <p:sldId id="920" r:id="rId6"/>
-    <p:sldId id="907" r:id="rId8"/>
-    <p:sldId id="908" r:id="rId9"/>
-    <p:sldId id="926" r:id="rId10"/>
-    <p:sldId id="923" r:id="rId11"/>
-    <p:sldId id="911" r:id="rId13"/>
-    <p:sldId id="912" r:id="rId14"/>
-    <p:sldId id="925" r:id="rId15"/>
-    <p:sldId id="927" r:id="rId16"/>
-    <p:sldId id="913" r:id="rId17"/>
-    <p:sldId id="928" r:id="rId18"/>
-    <p:sldId id="914" r:id="rId20"/>
-    <p:sldId id="915" r:id="rId21"/>
-    <p:sldId id="916" r:id="rId22"/>
-    <p:sldId id="929" r:id="rId23"/>
-    <p:sldId id="930" r:id="rId24"/>
-    <p:sldId id="917" r:id="rId26"/>
-    <p:sldId id="935" r:id="rId27"/>
+    <p:sldId id="907" r:id="rId7"/>
+    <p:sldId id="908" r:id="rId8"/>
+    <p:sldId id="926" r:id="rId9"/>
+    <p:sldId id="923" r:id="rId10"/>
+    <p:sldId id="911" r:id="rId11"/>
+    <p:sldId id="912" r:id="rId12"/>
+    <p:sldId id="925" r:id="rId13"/>
+    <p:sldId id="927" r:id="rId14"/>
+    <p:sldId id="913" r:id="rId15"/>
+    <p:sldId id="928" r:id="rId16"/>
+    <p:sldId id="914" r:id="rId17"/>
+    <p:sldId id="915" r:id="rId18"/>
+    <p:sldId id="916" r:id="rId19"/>
+    <p:sldId id="929" r:id="rId20"/>
+    <p:sldId id="930" r:id="rId21"/>
+    <p:sldId id="917" r:id="rId22"/>
+    <p:sldId id="935" r:id="rId23"/>
   </p:sldIdLst>
   <p:sldSz cx="12192000" cy="6858000"/>
   <p:notesSz cx="6858000" cy="9144000"/>
@@ -244,7 +244,7 @@
           <a:p>
             <a:fld id="{44623A65-BD25-40B6-8815-498297225DF7}" type="datetimeFigureOut">
               <a:rPr lang="pt-BR" smtClean="0"/>
-              <a:t>28/09/2026</a:t>
+              <a:t>22/10/2026</a:t>
             </a:fld>
             <a:endParaRPr lang="pt-BR" dirty="0"/>
           </a:p>
@@ -658,7 +658,7 @@
           <a:p>
             <a:fld id="{5B45E566-B383-4B2D-B951-1136FD38326E}" type="datetimeFigureOut">
               <a:rPr lang="pt-BR" smtClean="0"/>
-              <a:t>28/09/2026</a:t>
+              <a:t>22/10/2026</a:t>
             </a:fld>
             <a:endParaRPr lang="pt-BR" dirty="0"/>
           </a:p>
@@ -856,7 +856,7 @@
           <a:p>
             <a:fld id="{5B45E566-B383-4B2D-B951-1136FD38326E}" type="datetimeFigureOut">
               <a:rPr lang="pt-BR" smtClean="0"/>
-              <a:t>28/09/2026</a:t>
+              <a:t>22/10/2026</a:t>
             </a:fld>
             <a:endParaRPr lang="pt-BR" dirty="0"/>
           </a:p>
@@ -1064,7 +1064,7 @@
           <a:p>
             <a:fld id="{5B45E566-B383-4B2D-B951-1136FD38326E}" type="datetimeFigureOut">
               <a:rPr lang="pt-BR" smtClean="0"/>
-              <a:t>28/09/2026</a:t>
+              <a:t>22/10/2026</a:t>
             </a:fld>
             <a:endParaRPr lang="pt-BR" dirty="0"/>
           </a:p>
@@ -1262,7 +1262,7 @@
           <a:p>
             <a:fld id="{5B45E566-B383-4B2D-B951-1136FD38326E}" type="datetimeFigureOut">
               <a:rPr lang="pt-BR" smtClean="0"/>
-              <a:t>28/09/2026</a:t>
+              <a:t>22/10/2026</a:t>
             </a:fld>
             <a:endParaRPr lang="pt-BR" dirty="0"/>
           </a:p>
@@ -1537,7 +1537,7 @@
           <a:p>
             <a:fld id="{5B45E566-B383-4B2D-B951-1136FD38326E}" type="datetimeFigureOut">
               <a:rPr lang="pt-BR" smtClean="0"/>
-              <a:t>28/09/2026</a:t>
+              <a:t>22/10/2026</a:t>
             </a:fld>
             <a:endParaRPr lang="pt-BR" dirty="0"/>
           </a:p>
@@ -1802,7 +1802,7 @@
           <a:p>
             <a:fld id="{5B45E566-B383-4B2D-B951-1136FD38326E}" type="datetimeFigureOut">
               <a:rPr lang="pt-BR" smtClean="0"/>
-              <a:t>28/09/2026</a:t>
+              <a:t>22/10/2026</a:t>
             </a:fld>
             <a:endParaRPr lang="pt-BR" dirty="0"/>
           </a:p>
@@ -2214,7 +2214,7 @@
           <a:p>
             <a:fld id="{5B45E566-B383-4B2D-B951-1136FD38326E}" type="datetimeFigureOut">
               <a:rPr lang="pt-BR" smtClean="0"/>
-              <a:t>28/09/2026</a:t>
+              <a:t>22/10/2026</a:t>
             </a:fld>
             <a:endParaRPr lang="pt-BR" dirty="0"/>
           </a:p>
@@ -2355,7 +2355,7 @@
           <a:p>
             <a:fld id="{5B45E566-B383-4B2D-B951-1136FD38326E}" type="datetimeFigureOut">
               <a:rPr lang="pt-BR" smtClean="0"/>
-              <a:t>28/09/2026</a:t>
+              <a:t>22/10/2026</a:t>
             </a:fld>
             <a:endParaRPr lang="pt-BR" dirty="0"/>
           </a:p>
@@ -2468,7 +2468,7 @@
           <a:p>
             <a:fld id="{5B45E566-B383-4B2D-B951-1136FD38326E}" type="datetimeFigureOut">
               <a:rPr lang="pt-BR" smtClean="0"/>
-              <a:t>28/09/2026</a:t>
+              <a:t>22/10/2026</a:t>
             </a:fld>
             <a:endParaRPr lang="pt-BR" dirty="0"/>
           </a:p>
@@ -2779,7 +2779,7 @@
           <a:p>
             <a:fld id="{5B45E566-B383-4B2D-B951-1136FD38326E}" type="datetimeFigureOut">
               <a:rPr lang="pt-BR" smtClean="0"/>
-              <a:t>28/09/2026</a:t>
+              <a:t>22/10/2026</a:t>
             </a:fld>
             <a:endParaRPr lang="pt-BR" dirty="0"/>
           </a:p>
@@ -3067,7 +3067,7 @@
           <a:p>
             <a:fld id="{5B45E566-B383-4B2D-B951-1136FD38326E}" type="datetimeFigureOut">
               <a:rPr lang="pt-BR" smtClean="0"/>
-              <a:t>28/09/2026</a:t>
+              <a:t>22/10/2026</a:t>
             </a:fld>
             <a:endParaRPr lang="pt-BR" dirty="0"/>
           </a:p>
@@ -3332,7 +3332,7 @@
           <a:p>
             <a:fld id="{5B45E566-B383-4B2D-B951-1136FD38326E}" type="datetimeFigureOut">
               <a:rPr lang="pt-BR" smtClean="0"/>
-              <a:t>28/09/2026</a:t>
+              <a:t>22/10/2026</a:t>
             </a:fld>
             <a:endParaRPr lang="pt-BR" dirty="0"/>
           </a:p>
@@ -3905,15 +3905,23 @@
             </a:pPr>
             <a:r>
               <a:rPr lang="pt-BR" sz="2200" dirty="0"/>
-              <a:t>Montgomery, Runger. </a:t>
+              <a:t>Montgomery, Runger</a:t>
             </a:r>
             <a:r>
-              <a:rPr lang="pt-BR" sz="2200" b="1" dirty="0"/>
-              <a:t>Applied Statistics and Probability for Engineers</a:t>
+              <a:rPr lang="pt-BR" sz="2200"/>
+              <a:t>. </a:t>
+            </a:r>
+            <a:r>
+              <a:rPr lang="pt-BR" sz="2200" b="1"/>
+              <a:t>Estatística Aplicada e Probabilidade para Engenheiros</a:t>
+            </a:r>
+            <a:r>
+              <a:rPr lang="pt-BR" sz="2200"/>
+              <a:t>, 7ª ed. — </a:t>
             </a:r>
             <a:r>
               <a:rPr lang="pt-BR" sz="2200" dirty="0"/>
-              <a:t>, 7th ed — Cap. 3 (3.4, 3.6)</a:t>
+              <a:t>Cap. 3 (3.4, 3.6)</a:t>
             </a:r>
           </a:p>
           <a:p>
@@ -4063,1106 +4071,6 @@
       </p:grpSpPr>
       <mc:AlternateContent xmlns:mc="http://schemas.openxmlformats.org/markup-compatibility/2006" xmlns:a14="http://schemas.microsoft.com/office/drawing/2010/main">
         <mc:Choice Requires="a14">
-          <p:sp>
-            <p:nvSpPr>
-              <p:cNvPr id="6" name="CaixaDeTexto 5">
-                <a:extLst>
-                  <a:ext uri="{FF2B5EF4-FFF2-40B4-BE49-F238E27FC236}">
-                    <a16:creationId xmlns:a16="http://schemas.microsoft.com/office/drawing/2014/main" id="{720B10DA-C761-4DEE-8D86-E170E1C2E981}"/>
-                  </a:ext>
-                </a:extLst>
-              </p:cNvPr>
-              <p:cNvSpPr txBox="1"/>
-              <p:nvPr/>
-            </p:nvSpPr>
-            <p:spPr>
-              <a:xfrm>
-                <a:off x="669652" y="649940"/>
-                <a:ext cx="10067277" cy="5678478"/>
-              </a:xfrm>
-              <a:prstGeom prst="rect">
-                <a:avLst/>
-              </a:prstGeom>
-              <a:noFill/>
-            </p:spPr>
-            <p:txBody>
-              <a:bodyPr wrap="square" rtlCol="0">
-                <a:spAutoFit/>
-              </a:bodyPr>
-              <a:lstStyle/>
-              <a:p>
-                <a:pPr marL="342900" indent="-342900">
-                  <a:lnSpc>
-                    <a:spcPct val="150000"/>
-                  </a:lnSpc>
-                  <a:buFont typeface="Arial" panose="020B0604020202020204" pitchFamily="34" charset="0"/>
-                  <a:buChar char="•"/>
-                </a:pPr>
-                <a:r>
-                  <a:rPr lang="pt-BR" sz="2200" b="0" dirty="0"/>
-                  <a:t>Parâmetro </a:t>
-                </a:r>
-                <a14:m>
-                  <m:oMath xmlns:m="http://schemas.openxmlformats.org/officeDocument/2006/math">
-                    <m:r>
-                      <a:rPr lang="pt-BR" sz="2200" b="0" i="1" dirty="0" smtClean="0">
-                        <a:latin typeface="Cambria Math" panose="02040503050406030204" pitchFamily="18" charset="0"/>
-                      </a:rPr>
-                      <m:t>𝑝</m:t>
-                    </m:r>
-                  </m:oMath>
-                </a14:m>
-                <a:r>
-                  <a:rPr lang="pt-BR" sz="2200" b="0" dirty="0"/>
-                  <a:t> (probabilidade de sucesso = sair bola verde):</a:t>
-                </a:r>
-              </a:p>
-              <a:p>
-                <a:pPr>
-                  <a:lnSpc>
-                    <a:spcPct val="150000"/>
-                  </a:lnSpc>
-                </a:pPr>
-                <a14:m>
-                  <m:oMath xmlns:m="http://schemas.openxmlformats.org/officeDocument/2006/math">
-                    <m:r>
-                      <a:rPr lang="pt-BR" sz="2200" b="0" i="1" dirty="0" smtClean="0">
-                        <a:latin typeface="Cambria Math" panose="02040503050406030204" pitchFamily="18" charset="0"/>
-                      </a:rPr>
-                      <m:t>𝑝</m:t>
-                    </m:r>
-                    <m:r>
-                      <a:rPr lang="pt-BR" sz="2200" b="0" i="1" dirty="0" smtClean="0">
-                        <a:latin typeface="Cambria Math" panose="02040503050406030204" pitchFamily="18" charset="0"/>
-                      </a:rPr>
-                      <m:t> = </m:t>
-                    </m:r>
-                    <m:r>
-                      <a:rPr lang="pt-BR" sz="2200" b="0" i="1" dirty="0" smtClean="0">
-                        <a:latin typeface="Cambria Math" panose="02040503050406030204" pitchFamily="18" charset="0"/>
-                      </a:rPr>
-                      <m:t>𝑃</m:t>
-                    </m:r>
-                    <m:r>
-                      <a:rPr lang="pt-BR" sz="2200" b="0" i="1" dirty="0" smtClean="0">
-                        <a:latin typeface="Cambria Math" panose="02040503050406030204" pitchFamily="18" charset="0"/>
-                      </a:rPr>
-                      <m:t>(</m:t>
-                    </m:r>
-                    <m:r>
-                      <a:rPr lang="pt-BR" sz="2200" b="0" i="1" dirty="0" smtClean="0">
-                        <a:latin typeface="Cambria Math" panose="02040503050406030204" pitchFamily="18" charset="0"/>
-                      </a:rPr>
-                      <m:t>𝑋</m:t>
-                    </m:r>
-                    <m:r>
-                      <a:rPr lang="pt-BR" sz="2200" b="0" i="1" dirty="0" smtClean="0">
-                        <a:latin typeface="Cambria Math" panose="02040503050406030204" pitchFamily="18" charset="0"/>
-                      </a:rPr>
-                      <m:t>=1) =</m:t>
-                    </m:r>
-                  </m:oMath>
-                </a14:m>
-                <a:r>
-                  <a:rPr lang="pt-BR" sz="2200" b="0" dirty="0"/>
-                  <a:t> bolas verdes / total de bolas </a:t>
-                </a:r>
-                <a14:m>
-                  <m:oMath xmlns:m="http://schemas.openxmlformats.org/officeDocument/2006/math">
-                    <m:r>
-                      <a:rPr lang="pt-BR" sz="2200" b="0" i="1" dirty="0" smtClean="0">
-                        <a:latin typeface="Cambria Math" panose="02040503050406030204" pitchFamily="18" charset="0"/>
-                      </a:rPr>
-                      <m:t>= 20/50 = 2/5 = 0,4</m:t>
-                    </m:r>
-                  </m:oMath>
-                </a14:m>
-                <a:endParaRPr lang="pt-BR" sz="2200" b="0" dirty="0"/>
-              </a:p>
-              <a:p>
-                <a:pPr>
-                  <a:lnSpc>
-                    <a:spcPct val="150000"/>
-                  </a:lnSpc>
-                </a:pPr>
-                <a14:m>
-                  <m:oMath xmlns:m="http://schemas.openxmlformats.org/officeDocument/2006/math">
-                    <m:r>
-                      <a:rPr lang="pt-BR" sz="2200" b="0" i="1" dirty="0" smtClean="0">
-                        <a:latin typeface="Cambria Math" panose="02040503050406030204" pitchFamily="18" charset="0"/>
-                      </a:rPr>
-                      <m:t>𝑞</m:t>
-                    </m:r>
-                    <m:r>
-                      <a:rPr lang="pt-BR" sz="2200" b="0" i="1" dirty="0" smtClean="0">
-                        <a:latin typeface="Cambria Math" panose="02040503050406030204" pitchFamily="18" charset="0"/>
-                      </a:rPr>
-                      <m:t> = </m:t>
-                    </m:r>
-                    <m:r>
-                      <a:rPr lang="pt-BR" sz="2200" b="0" i="1" dirty="0" smtClean="0">
-                        <a:latin typeface="Cambria Math" panose="02040503050406030204" pitchFamily="18" charset="0"/>
-                      </a:rPr>
-                      <m:t>𝑃</m:t>
-                    </m:r>
-                    <m:r>
-                      <a:rPr lang="pt-BR" sz="2200" b="0" i="1" dirty="0" smtClean="0">
-                        <a:latin typeface="Cambria Math" panose="02040503050406030204" pitchFamily="18" charset="0"/>
-                      </a:rPr>
-                      <m:t>(</m:t>
-                    </m:r>
-                    <m:r>
-                      <a:rPr lang="pt-BR" sz="2200" b="0" i="1" dirty="0" smtClean="0">
-                        <a:latin typeface="Cambria Math" panose="02040503050406030204" pitchFamily="18" charset="0"/>
-                      </a:rPr>
-                      <m:t>𝑋</m:t>
-                    </m:r>
-                    <m:r>
-                      <a:rPr lang="pt-BR" sz="2200" b="0" i="1" dirty="0" smtClean="0">
-                        <a:latin typeface="Cambria Math" panose="02040503050406030204" pitchFamily="18" charset="0"/>
-                      </a:rPr>
-                      <m:t>=0) = 1 − </m:t>
-                    </m:r>
-                    <m:r>
-                      <a:rPr lang="pt-BR" sz="2200" b="0" i="1" dirty="0" smtClean="0">
-                        <a:latin typeface="Cambria Math" panose="02040503050406030204" pitchFamily="18" charset="0"/>
-                      </a:rPr>
-                      <m:t>𝑝</m:t>
-                    </m:r>
-                    <m:r>
-                      <a:rPr lang="pt-BR" sz="2200" b="0" i="1" dirty="0" smtClean="0">
-                        <a:latin typeface="Cambria Math" panose="02040503050406030204" pitchFamily="18" charset="0"/>
-                      </a:rPr>
-                      <m:t> = 30/50 = 3/5 = 0,6</m:t>
-                    </m:r>
-                  </m:oMath>
-                </a14:m>
-                <a:r>
-                  <a:rPr lang="pt-BR" sz="2200" b="0" dirty="0"/>
-                  <a:t> </a:t>
-                </a:r>
-              </a:p>
-              <a:p>
-                <a:pPr marL="342900" indent="-342900">
-                  <a:lnSpc>
-                    <a:spcPct val="150000"/>
-                  </a:lnSpc>
-                  <a:buFont typeface="Arial" panose="020B0604020202020204" pitchFamily="34" charset="0"/>
-                  <a:buChar char="•"/>
-                </a:pPr>
-                <a:r>
-                  <a:rPr lang="pt-BR" sz="2200" b="0" dirty="0"/>
-                  <a:t>Função de probabilidade P(X):</a:t>
-                </a:r>
-              </a:p>
-              <a:p>
-                <a:pPr>
-                  <a:lnSpc>
-                    <a:spcPct val="150000"/>
-                  </a:lnSpc>
-                </a:pPr>
-                <a:endParaRPr lang="pt-BR" sz="2200" b="0" dirty="0"/>
-              </a:p>
-              <a:p>
-                <a:pPr>
-                  <a:lnSpc>
-                    <a:spcPct val="150000"/>
-                  </a:lnSpc>
-                </a:pPr>
-                <a:endParaRPr lang="pt-BR" sz="2200" b="0" dirty="0"/>
-              </a:p>
-              <a:p>
-                <a:pPr marL="342900" indent="-342900">
-                  <a:lnSpc>
-                    <a:spcPct val="150000"/>
-                  </a:lnSpc>
-                  <a:buFont typeface="Arial" panose="020B0604020202020204" pitchFamily="34" charset="0"/>
-                  <a:buChar char="•"/>
-                </a:pPr>
-                <a:endParaRPr lang="pt-BR" sz="2200" b="0" dirty="0"/>
-              </a:p>
-              <a:p>
-                <a:pPr marL="342900" indent="-342900">
-                  <a:lnSpc>
-                    <a:spcPct val="150000"/>
-                  </a:lnSpc>
-                  <a:buFont typeface="Arial" panose="020B0604020202020204" pitchFamily="34" charset="0"/>
-                  <a:buChar char="•"/>
-                </a:pPr>
-                <a:r>
-                  <a:rPr lang="pt-BR" sz="2200" b="0" dirty="0"/>
-                  <a:t>Esperança:</a:t>
-                </a:r>
-              </a:p>
-              <a:p>
-                <a:pPr>
-                  <a:lnSpc>
-                    <a:spcPct val="150000"/>
-                  </a:lnSpc>
-                </a:pPr>
-                <a14:m>
-                  <m:oMathPara xmlns:m="http://schemas.openxmlformats.org/officeDocument/2006/math">
-                    <m:oMathParaPr>
-                      <m:jc m:val="centerGroup"/>
-                    </m:oMathParaPr>
-                    <m:oMath xmlns:m="http://schemas.openxmlformats.org/officeDocument/2006/math">
-                      <m:r>
-                        <a:rPr lang="pt-BR" sz="2200" b="0" i="1" dirty="0" smtClean="0">
-                          <a:latin typeface="Cambria Math" panose="02040503050406030204" pitchFamily="18" charset="0"/>
-                        </a:rPr>
-                        <m:t>𝐸</m:t>
-                      </m:r>
-                      <m:r>
-                        <a:rPr lang="pt-BR" sz="2200" b="0" i="1" dirty="0" smtClean="0">
-                          <a:latin typeface="Cambria Math" panose="02040503050406030204" pitchFamily="18" charset="0"/>
-                        </a:rPr>
-                        <m:t>(</m:t>
-                      </m:r>
-                      <m:r>
-                        <a:rPr lang="pt-BR" sz="2200" b="0" i="1" dirty="0" smtClean="0">
-                          <a:latin typeface="Cambria Math" panose="02040503050406030204" pitchFamily="18" charset="0"/>
-                        </a:rPr>
-                        <m:t>𝑋</m:t>
-                      </m:r>
-                      <m:r>
-                        <a:rPr lang="pt-BR" sz="2200" b="0" i="1" dirty="0" smtClean="0">
-                          <a:latin typeface="Cambria Math" panose="02040503050406030204" pitchFamily="18" charset="0"/>
-                        </a:rPr>
-                        <m:t>) = </m:t>
-                      </m:r>
-                      <m:r>
-                        <a:rPr lang="pt-BR" sz="2200" b="0" i="1" dirty="0" smtClean="0">
-                          <a:latin typeface="Cambria Math" panose="02040503050406030204" pitchFamily="18" charset="0"/>
-                        </a:rPr>
-                        <m:t>𝑝</m:t>
-                      </m:r>
-                      <m:r>
-                        <a:rPr lang="pt-BR" sz="2200" b="0" i="1" dirty="0" smtClean="0">
-                          <a:latin typeface="Cambria Math" panose="02040503050406030204" pitchFamily="18" charset="0"/>
-                        </a:rPr>
-                        <m:t> = 0,4</m:t>
-                      </m:r>
-                    </m:oMath>
-                  </m:oMathPara>
-                </a14:m>
-                <a:endParaRPr lang="pt-BR" sz="2200" b="0" dirty="0"/>
-              </a:p>
-              <a:p>
-                <a:pPr marL="342900" indent="-342900">
-                  <a:lnSpc>
-                    <a:spcPct val="150000"/>
-                  </a:lnSpc>
-                  <a:buFont typeface="Arial" panose="020B0604020202020204" pitchFamily="34" charset="0"/>
-                  <a:buChar char="•"/>
-                </a:pPr>
-                <a:r>
-                  <a:rPr lang="pt-BR" sz="2200" b="0" dirty="0"/>
-                  <a:t>Variância:</a:t>
-                </a:r>
-              </a:p>
-              <a:p>
-                <a:pPr>
-                  <a:lnSpc>
-                    <a:spcPct val="150000"/>
-                  </a:lnSpc>
-                </a:pPr>
-                <a14:m>
-                  <m:oMathPara xmlns:m="http://schemas.openxmlformats.org/officeDocument/2006/math">
-                    <m:oMathParaPr>
-                      <m:jc m:val="centerGroup"/>
-                    </m:oMathParaPr>
-                    <m:oMath xmlns:m="http://schemas.openxmlformats.org/officeDocument/2006/math">
-                      <m:r>
-                        <a:rPr lang="pt-BR" sz="2200" b="0" i="1" dirty="0" smtClean="0">
-                          <a:latin typeface="Cambria Math" panose="02040503050406030204" pitchFamily="18" charset="0"/>
-                        </a:rPr>
-                        <m:t>𝑉𝑎𝑟</m:t>
-                      </m:r>
-                      <m:r>
-                        <a:rPr lang="pt-BR" sz="2200" b="0" i="1" dirty="0" smtClean="0">
-                          <a:latin typeface="Cambria Math" panose="02040503050406030204" pitchFamily="18" charset="0"/>
-                        </a:rPr>
-                        <m:t>(</m:t>
-                      </m:r>
-                      <m:r>
-                        <a:rPr lang="pt-BR" sz="2200" b="0" i="1" dirty="0" smtClean="0">
-                          <a:latin typeface="Cambria Math" panose="02040503050406030204" pitchFamily="18" charset="0"/>
-                        </a:rPr>
-                        <m:t>𝑋</m:t>
-                      </m:r>
-                      <m:r>
-                        <a:rPr lang="pt-BR" sz="2200" b="0" i="1" dirty="0" smtClean="0">
-                          <a:latin typeface="Cambria Math" panose="02040503050406030204" pitchFamily="18" charset="0"/>
-                        </a:rPr>
-                        <m:t>) = </m:t>
-                      </m:r>
-                      <m:r>
-                        <a:rPr lang="pt-BR" sz="2200" b="0" i="1" dirty="0" smtClean="0">
-                          <a:latin typeface="Cambria Math" panose="02040503050406030204" pitchFamily="18" charset="0"/>
-                        </a:rPr>
-                        <m:t>𝑝</m:t>
-                      </m:r>
-                      <m:r>
-                        <a:rPr lang="pt-BR" sz="2200" b="0" i="1" dirty="0" smtClean="0">
-                          <a:latin typeface="Cambria Math" panose="02040503050406030204" pitchFamily="18" charset="0"/>
-                        </a:rPr>
-                        <m:t>(1−</m:t>
-                      </m:r>
-                      <m:r>
-                        <a:rPr lang="pt-BR" sz="2200" b="0" i="1" dirty="0" smtClean="0">
-                          <a:latin typeface="Cambria Math" panose="02040503050406030204" pitchFamily="18" charset="0"/>
-                        </a:rPr>
-                        <m:t>𝑝</m:t>
-                      </m:r>
-                      <m:r>
-                        <a:rPr lang="pt-BR" sz="2200" b="0" i="1" dirty="0" smtClean="0">
-                          <a:latin typeface="Cambria Math" panose="02040503050406030204" pitchFamily="18" charset="0"/>
-                        </a:rPr>
-                        <m:t>) = </m:t>
-                      </m:r>
-                      <m:r>
-                        <a:rPr lang="pt-BR" sz="2200" b="0" i="1" dirty="0" err="1">
-                          <a:latin typeface="Cambria Math" panose="02040503050406030204" pitchFamily="18" charset="0"/>
-                        </a:rPr>
-                        <m:t>𝑝</m:t>
-                      </m:r>
-                      <m:r>
-                        <a:rPr lang="pt-BR" sz="2200" b="0" i="1" dirty="0" err="1">
-                          <a:latin typeface="Cambria Math" panose="02040503050406030204" pitchFamily="18" charset="0"/>
-                        </a:rPr>
-                        <m:t>·</m:t>
-                      </m:r>
-                      <m:r>
-                        <a:rPr lang="pt-BR" sz="2200" b="0" i="1" dirty="0" err="1">
-                          <a:latin typeface="Cambria Math" panose="02040503050406030204" pitchFamily="18" charset="0"/>
-                        </a:rPr>
-                        <m:t>𝑞</m:t>
-                      </m:r>
-                      <m:r>
-                        <a:rPr lang="pt-BR" sz="2200" b="0" i="1" dirty="0">
-                          <a:latin typeface="Cambria Math" panose="02040503050406030204" pitchFamily="18" charset="0"/>
-                        </a:rPr>
-                        <m:t> = 0,4 × 0,6 = 0,24</m:t>
-                      </m:r>
-                    </m:oMath>
-                  </m:oMathPara>
-                </a14:m>
-                <a:endParaRPr lang="pt-BR" sz="2200" b="0" dirty="0"/>
-              </a:p>
-            </p:txBody>
-          </p:sp>
-        </mc:Choice>
-        <mc:Fallback xmlns="">
-          <p:sp>
-            <p:nvSpPr>
-              <p:cNvPr id="6" name="CaixaDeTexto 5">
-                <a:extLst>
-                  <a:ext uri="{FF2B5EF4-FFF2-40B4-BE49-F238E27FC236}">
-                    <a16:creationId xmlns:a16="http://schemas.microsoft.com/office/drawing/2014/main" id="{720B10DA-C761-4DEE-8D86-E170E1C2E981}"/>
-                  </a:ext>
-                </a:extLst>
-              </p:cNvPr>
-              <p:cNvSpPr txBox="1">
-                <a:spLocks noRot="1" noChangeAspect="1" noMove="1" noResize="1" noEditPoints="1" noAdjustHandles="1" noChangeArrowheads="1" noChangeShapeType="1" noTextEdit="1"/>
-              </p:cNvSpPr>
-              <p:nvPr/>
-            </p:nvSpPr>
-            <p:spPr>
-              <a:xfrm>
-                <a:off x="669652" y="649940"/>
-                <a:ext cx="10067277" cy="5678478"/>
-              </a:xfrm>
-              <a:prstGeom prst="rect">
-                <a:avLst/>
-              </a:prstGeom>
-              <a:blipFill>
-                <a:blip r:embed="rId2"/>
-                <a:stretch>
-                  <a:fillRect l="-727"/>
-                </a:stretch>
-              </a:blipFill>
-            </p:spPr>
-            <p:txBody>
-              <a:bodyPr/>
-              <a:lstStyle/>
-              <a:p>
-                <a:r>
-                  <a:rPr lang="pt-BR">
-                    <a:noFill/>
-                  </a:rPr>
-                  <a:t> </a:t>
-                </a:r>
-              </a:p>
-            </p:txBody>
-          </p:sp>
-        </mc:Fallback>
-      </mc:AlternateContent>
-      <p:sp>
-        <p:nvSpPr>
-          <p:cNvPr id="3" name="CaixaDeTexto 2">
-            <a:extLst>
-              <a:ext uri="{FF2B5EF4-FFF2-40B4-BE49-F238E27FC236}">
-                <a16:creationId xmlns:a16="http://schemas.microsoft.com/office/drawing/2014/main" id="{19131A04-B5D6-4211-8B49-4615DE5797E9}"/>
-              </a:ext>
-            </a:extLst>
-          </p:cNvPr>
-          <p:cNvSpPr txBox="1"/>
-          <p:nvPr/>
-        </p:nvSpPr>
-        <p:spPr>
-          <a:xfrm>
-            <a:off x="361395" y="6488668"/>
-            <a:ext cx="7620000" cy="300210"/>
-          </a:xfrm>
-          <a:prstGeom prst="rect">
-            <a:avLst/>
-          </a:prstGeom>
-          <a:noFill/>
-        </p:spPr>
-        <p:txBody>
-          <a:bodyPr wrap="none" rtlCol="0">
-            <a:spAutoFit/>
-          </a:bodyPr>
-          <a:lstStyle/>
-          <a:p>
-            <a:r>
-              <a:rPr lang="pt-BR" sz="1351" dirty="0"/>
-              <a:t>CEA055 - Estatística e Probabilidade - Professor: Marcos Goulart Lima</a:t>
-            </a:r>
-          </a:p>
-        </p:txBody>
-      </p:sp>
-      <p:graphicFrame>
-        <p:nvGraphicFramePr>
-          <p:cNvPr id="7" name="Tabela distribuicao"/>
-          <p:cNvGraphicFramePr>
-            <a:graphicFrameLocks noGrp="1"/>
-          </p:cNvGraphicFramePr>
-          <p:nvPr>
-            <p:extLst>
-              <p:ext uri="{D42A27DB-BD31-4B8C-83A1-F6EECF244321}">
-                <p14:modId xmlns:p14="http://schemas.microsoft.com/office/powerpoint/2010/main" val="750543979"/>
-              </p:ext>
-            </p:extLst>
-          </p:nvPr>
-        </p:nvGraphicFramePr>
-        <p:xfrm>
-          <a:off x="1093305" y="2921000"/>
-          <a:ext cx="4412973" cy="1016000"/>
-        </p:xfrm>
-        <a:graphic>
-          <a:graphicData uri="http://schemas.openxmlformats.org/drawingml/2006/table">
-            <a:tbl>
-              <a:tblPr firstRow="1"/>
-              <a:tblGrid>
-                <a:gridCol w="1186283">
-                  <a:extLst>
-                    <a:ext uri="{9D8B030D-6E8A-4147-A177-3AD203B41FA5}">
-                      <a16:colId xmlns:a16="http://schemas.microsoft.com/office/drawing/2014/main" val="20000"/>
-                    </a:ext>
-                  </a:extLst>
-                </a:gridCol>
-                <a:gridCol w="1613345">
-                  <a:extLst>
-                    <a:ext uri="{9D8B030D-6E8A-4147-A177-3AD203B41FA5}">
-                      <a16:colId xmlns:a16="http://schemas.microsoft.com/office/drawing/2014/main" val="20001"/>
-                    </a:ext>
-                  </a:extLst>
-                </a:gridCol>
-                <a:gridCol w="1613345">
-                  <a:extLst>
-                    <a:ext uri="{9D8B030D-6E8A-4147-A177-3AD203B41FA5}">
-                      <a16:colId xmlns:a16="http://schemas.microsoft.com/office/drawing/2014/main" val="20002"/>
-                    </a:ext>
-                  </a:extLst>
-                </a:gridCol>
-              </a:tblGrid>
-              <a:tr h="508000">
-                <a:tc>
-                  <a:txBody>
-                    <a:bodyPr/>
-                    <a:lstStyle/>
-                    <a:p>
-                      <a:pPr algn="l"/>
-                      <a:r>
-                        <a:rPr lang="pt-BR" sz="2400" b="1" dirty="0"/>
-                        <a:t>x</a:t>
-                      </a:r>
-                    </a:p>
-                  </a:txBody>
-                  <a:tcPr anchor="ctr">
-                    <a:lnL w="12700" cap="flat" cmpd="sng" algn="ctr">
-                      <a:solidFill>
-                        <a:schemeClr val="tx1"/>
-                      </a:solidFill>
-                      <a:prstDash val="solid"/>
-                      <a:round/>
-                      <a:headEnd type="none" w="med" len="med"/>
-                      <a:tailEnd type="none" w="med" len="med"/>
-                    </a:lnL>
-                    <a:lnR w="12700" cap="flat" cmpd="sng" algn="ctr">
-                      <a:solidFill>
-                        <a:schemeClr val="tx1"/>
-                      </a:solidFill>
-                      <a:prstDash val="solid"/>
-                      <a:round/>
-                      <a:headEnd type="none" w="med" len="med"/>
-                      <a:tailEnd type="none" w="med" len="med"/>
-                    </a:lnR>
-                    <a:lnT w="12700" cap="flat" cmpd="sng" algn="ctr">
-                      <a:solidFill>
-                        <a:schemeClr val="tx1"/>
-                      </a:solidFill>
-                      <a:prstDash val="solid"/>
-                      <a:round/>
-                      <a:headEnd type="none" w="med" len="med"/>
-                      <a:tailEnd type="none" w="med" len="med"/>
-                    </a:lnT>
-                    <a:lnB w="12700" cap="flat" cmpd="sng" algn="ctr">
-                      <a:solidFill>
-                        <a:schemeClr val="tx1"/>
-                      </a:solidFill>
-                      <a:prstDash val="solid"/>
-                      <a:round/>
-                      <a:headEnd type="none" w="med" len="med"/>
-                      <a:tailEnd type="none" w="med" len="med"/>
-                    </a:lnB>
-                    <a:noFill/>
-                  </a:tcPr>
-                </a:tc>
-                <a:tc>
-                  <a:txBody>
-                    <a:bodyPr/>
-                    <a:lstStyle/>
-                    <a:p>
-                      <a:pPr algn="ctr"/>
-                      <a:r>
-                        <a:rPr lang="pt-BR" sz="2400" b="1" dirty="0"/>
-                        <a:t>0</a:t>
-                      </a:r>
-                    </a:p>
-                  </a:txBody>
-                  <a:tcPr anchor="ctr">
-                    <a:lnL w="12700" cap="flat" cmpd="sng" algn="ctr">
-                      <a:solidFill>
-                        <a:schemeClr val="tx1"/>
-                      </a:solidFill>
-                      <a:prstDash val="solid"/>
-                      <a:round/>
-                      <a:headEnd type="none" w="med" len="med"/>
-                      <a:tailEnd type="none" w="med" len="med"/>
-                    </a:lnL>
-                    <a:lnR w="12700" cap="flat" cmpd="sng" algn="ctr">
-                      <a:solidFill>
-                        <a:schemeClr val="tx1"/>
-                      </a:solidFill>
-                      <a:prstDash val="solid"/>
-                      <a:round/>
-                      <a:headEnd type="none" w="med" len="med"/>
-                      <a:tailEnd type="none" w="med" len="med"/>
-                    </a:lnR>
-                    <a:lnT w="12700" cap="flat" cmpd="sng" algn="ctr">
-                      <a:solidFill>
-                        <a:schemeClr val="tx1"/>
-                      </a:solidFill>
-                      <a:prstDash val="solid"/>
-                      <a:round/>
-                      <a:headEnd type="none" w="med" len="med"/>
-                      <a:tailEnd type="none" w="med" len="med"/>
-                    </a:lnT>
-                    <a:lnB w="12700" cap="flat" cmpd="sng" algn="ctr">
-                      <a:solidFill>
-                        <a:schemeClr val="tx1"/>
-                      </a:solidFill>
-                      <a:prstDash val="solid"/>
-                      <a:round/>
-                      <a:headEnd type="none" w="med" len="med"/>
-                      <a:tailEnd type="none" w="med" len="med"/>
-                    </a:lnB>
-                    <a:noFill/>
-                  </a:tcPr>
-                </a:tc>
-                <a:tc>
-                  <a:txBody>
-                    <a:bodyPr/>
-                    <a:lstStyle/>
-                    <a:p>
-                      <a:pPr algn="ctr"/>
-                      <a:r>
-                        <a:rPr lang="pt-BR" sz="2400" b="1" dirty="0"/>
-                        <a:t>1</a:t>
-                      </a:r>
-                    </a:p>
-                  </a:txBody>
-                  <a:tcPr anchor="ctr">
-                    <a:lnL w="12700" cap="flat" cmpd="sng" algn="ctr">
-                      <a:solidFill>
-                        <a:schemeClr val="tx1"/>
-                      </a:solidFill>
-                      <a:prstDash val="solid"/>
-                      <a:round/>
-                      <a:headEnd type="none" w="med" len="med"/>
-                      <a:tailEnd type="none" w="med" len="med"/>
-                    </a:lnL>
-                    <a:lnR w="12700" cap="flat" cmpd="sng" algn="ctr">
-                      <a:solidFill>
-                        <a:schemeClr val="tx1"/>
-                      </a:solidFill>
-                      <a:prstDash val="solid"/>
-                      <a:round/>
-                      <a:headEnd type="none" w="med" len="med"/>
-                      <a:tailEnd type="none" w="med" len="med"/>
-                    </a:lnR>
-                    <a:lnT w="12700" cap="flat" cmpd="sng" algn="ctr">
-                      <a:solidFill>
-                        <a:schemeClr val="tx1"/>
-                      </a:solidFill>
-                      <a:prstDash val="solid"/>
-                      <a:round/>
-                      <a:headEnd type="none" w="med" len="med"/>
-                      <a:tailEnd type="none" w="med" len="med"/>
-                    </a:lnT>
-                    <a:lnB w="12700" cap="flat" cmpd="sng" algn="ctr">
-                      <a:solidFill>
-                        <a:schemeClr val="tx1"/>
-                      </a:solidFill>
-                      <a:prstDash val="solid"/>
-                      <a:round/>
-                      <a:headEnd type="none" w="med" len="med"/>
-                      <a:tailEnd type="none" w="med" len="med"/>
-                    </a:lnB>
-                    <a:noFill/>
-                  </a:tcPr>
-                </a:tc>
-                <a:extLst>
-                  <a:ext uri="{0D108BD9-81ED-4DB2-BD59-A6C34878D82A}">
-                    <a16:rowId xmlns:a16="http://schemas.microsoft.com/office/drawing/2014/main" val="10000"/>
-                  </a:ext>
-                </a:extLst>
-              </a:tr>
-              <a:tr h="508000">
-                <a:tc>
-                  <a:txBody>
-                    <a:bodyPr/>
-                    <a:lstStyle/>
-                    <a:p>
-                      <a:pPr algn="l"/>
-                      <a:r>
-                        <a:rPr lang="pt-BR" sz="2400" b="1" dirty="0"/>
-                        <a:t>P(X = x)</a:t>
-                      </a:r>
-                    </a:p>
-                  </a:txBody>
-                  <a:tcPr anchor="ctr">
-                    <a:lnL w="12700" cap="flat" cmpd="sng" algn="ctr">
-                      <a:solidFill>
-                        <a:schemeClr val="tx1"/>
-                      </a:solidFill>
-                      <a:prstDash val="solid"/>
-                      <a:round/>
-                      <a:headEnd type="none" w="med" len="med"/>
-                      <a:tailEnd type="none" w="med" len="med"/>
-                    </a:lnL>
-                    <a:lnR w="12700" cap="flat" cmpd="sng" algn="ctr">
-                      <a:solidFill>
-                        <a:schemeClr val="tx1"/>
-                      </a:solidFill>
-                      <a:prstDash val="solid"/>
-                      <a:round/>
-                      <a:headEnd type="none" w="med" len="med"/>
-                      <a:tailEnd type="none" w="med" len="med"/>
-                    </a:lnR>
-                    <a:lnT w="12700" cap="flat" cmpd="sng" algn="ctr">
-                      <a:solidFill>
-                        <a:schemeClr val="tx1"/>
-                      </a:solidFill>
-                      <a:prstDash val="solid"/>
-                      <a:round/>
-                      <a:headEnd type="none" w="med" len="med"/>
-                      <a:tailEnd type="none" w="med" len="med"/>
-                    </a:lnT>
-                    <a:lnB w="12700" cap="flat" cmpd="sng" algn="ctr">
-                      <a:solidFill>
-                        <a:schemeClr val="tx1"/>
-                      </a:solidFill>
-                      <a:prstDash val="solid"/>
-                      <a:round/>
-                      <a:headEnd type="none" w="med" len="med"/>
-                      <a:tailEnd type="none" w="med" len="med"/>
-                    </a:lnB>
-                    <a:noFill/>
-                  </a:tcPr>
-                </a:tc>
-                <a:tc>
-                  <a:txBody>
-                    <a:bodyPr/>
-                    <a:lstStyle/>
-                    <a:p>
-                      <a:pPr algn="ctr"/>
-                      <a:r>
-                        <a:rPr lang="pt-BR" sz="2400" dirty="0"/>
-                        <a:t>0,6</a:t>
-                      </a:r>
-                    </a:p>
-                  </a:txBody>
-                  <a:tcPr anchor="ctr">
-                    <a:lnL w="12700" cap="flat" cmpd="sng" algn="ctr">
-                      <a:solidFill>
-                        <a:schemeClr val="tx1"/>
-                      </a:solidFill>
-                      <a:prstDash val="solid"/>
-                      <a:round/>
-                      <a:headEnd type="none" w="med" len="med"/>
-                      <a:tailEnd type="none" w="med" len="med"/>
-                    </a:lnL>
-                    <a:lnR w="12700" cap="flat" cmpd="sng" algn="ctr">
-                      <a:solidFill>
-                        <a:schemeClr val="tx1"/>
-                      </a:solidFill>
-                      <a:prstDash val="solid"/>
-                      <a:round/>
-                      <a:headEnd type="none" w="med" len="med"/>
-                      <a:tailEnd type="none" w="med" len="med"/>
-                    </a:lnR>
-                    <a:lnT w="12700" cap="flat" cmpd="sng" algn="ctr">
-                      <a:solidFill>
-                        <a:schemeClr val="tx1"/>
-                      </a:solidFill>
-                      <a:prstDash val="solid"/>
-                      <a:round/>
-                      <a:headEnd type="none" w="med" len="med"/>
-                      <a:tailEnd type="none" w="med" len="med"/>
-                    </a:lnT>
-                    <a:lnB w="12700" cap="flat" cmpd="sng" algn="ctr">
-                      <a:solidFill>
-                        <a:schemeClr val="tx1"/>
-                      </a:solidFill>
-                      <a:prstDash val="solid"/>
-                      <a:round/>
-                      <a:headEnd type="none" w="med" len="med"/>
-                      <a:tailEnd type="none" w="med" len="med"/>
-                    </a:lnB>
-                    <a:noFill/>
-                  </a:tcPr>
-                </a:tc>
-                <a:tc>
-                  <a:txBody>
-                    <a:bodyPr/>
-                    <a:lstStyle/>
-                    <a:p>
-                      <a:pPr algn="ctr"/>
-                      <a:r>
-                        <a:rPr lang="pt-BR" sz="2400" dirty="0"/>
-                        <a:t>0,4</a:t>
-                      </a:r>
-                    </a:p>
-                  </a:txBody>
-                  <a:tcPr anchor="ctr">
-                    <a:lnL w="12700" cap="flat" cmpd="sng" algn="ctr">
-                      <a:solidFill>
-                        <a:schemeClr val="tx1"/>
-                      </a:solidFill>
-                      <a:prstDash val="solid"/>
-                      <a:round/>
-                      <a:headEnd type="none" w="med" len="med"/>
-                      <a:tailEnd type="none" w="med" len="med"/>
-                    </a:lnL>
-                    <a:lnR w="12700" cap="flat" cmpd="sng" algn="ctr">
-                      <a:solidFill>
-                        <a:schemeClr val="tx1"/>
-                      </a:solidFill>
-                      <a:prstDash val="solid"/>
-                      <a:round/>
-                      <a:headEnd type="none" w="med" len="med"/>
-                      <a:tailEnd type="none" w="med" len="med"/>
-                    </a:lnR>
-                    <a:lnT w="12700" cap="flat" cmpd="sng" algn="ctr">
-                      <a:solidFill>
-                        <a:schemeClr val="tx1"/>
-                      </a:solidFill>
-                      <a:prstDash val="solid"/>
-                      <a:round/>
-                      <a:headEnd type="none" w="med" len="med"/>
-                      <a:tailEnd type="none" w="med" len="med"/>
-                    </a:lnT>
-                    <a:lnB w="12700" cap="flat" cmpd="sng" algn="ctr">
-                      <a:solidFill>
-                        <a:schemeClr val="tx1"/>
-                      </a:solidFill>
-                      <a:prstDash val="solid"/>
-                      <a:round/>
-                      <a:headEnd type="none" w="med" len="med"/>
-                      <a:tailEnd type="none" w="med" len="med"/>
-                    </a:lnB>
-                    <a:noFill/>
-                  </a:tcPr>
-                </a:tc>
-                <a:extLst>
-                  <a:ext uri="{0D108BD9-81ED-4DB2-BD59-A6C34878D82A}">
-                    <a16:rowId xmlns:a16="http://schemas.microsoft.com/office/drawing/2014/main" val="10001"/>
-                  </a:ext>
-                </a:extLst>
-              </a:tr>
-            </a:tbl>
-          </a:graphicData>
-        </a:graphic>
-      </p:graphicFrame>
-    </p:spTree>
-    <p:extLst>
-      <p:ext uri="{BB962C8B-B14F-4D97-AF65-F5344CB8AC3E}">
-        <p14:creationId xmlns:p14="http://schemas.microsoft.com/office/powerpoint/2010/main" val="4158213510"/>
-      </p:ext>
-    </p:extLst>
-  </p:cSld>
-  <p:clrMapOvr>
-    <a:masterClrMapping/>
-  </p:clrMapOvr>
-</p:sld>
-</file>
-
-<file path=ppt/slides/slide11.xml><?xml version="1.0" encoding="utf-8"?>
-<p:sld xmlns:a="http://schemas.openxmlformats.org/drawingml/2006/main" xmlns:r="http://schemas.openxmlformats.org/officeDocument/2006/relationships" xmlns:p="http://schemas.openxmlformats.org/presentationml/2006/main">
-  <p:cSld>
-    <p:bg>
-      <p:bgPr>
-        <a:solidFill>
-          <a:srgbClr val="E6CCCC"/>
-        </a:solidFill>
-        <a:effectLst/>
-      </p:bgPr>
-    </p:bg>
-    <p:spTree>
-      <p:nvGrpSpPr>
-        <p:cNvPr id="1" name=""/>
-        <p:cNvGrpSpPr/>
-        <p:nvPr/>
-      </p:nvGrpSpPr>
-      <p:grpSpPr>
-        <a:xfrm>
-          <a:off x="0" y="0"/>
-          <a:ext cx="0" cy="0"/>
-          <a:chOff x="0" y="0"/>
-          <a:chExt cx="0" cy="0"/>
-        </a:xfrm>
-      </p:grpSpPr>
-      <p:sp>
-        <p:nvSpPr>
-          <p:cNvPr id="2" name="Oval 1"/>
-          <p:cNvSpPr/>
-          <p:nvPr/>
-        </p:nvSpPr>
-        <p:spPr>
-          <a:xfrm>
-            <a:off x="5775960" y="457200"/>
-            <a:ext cx="640080" cy="640080"/>
-          </a:xfrm>
-          <a:prstGeom prst="ellipse">
-            <a:avLst/>
-          </a:prstGeom>
-          <a:solidFill>
-            <a:srgbClr val="8A3B3F"/>
-          </a:solidFill>
-          <a:ln>
-            <a:noFill/>
-          </a:ln>
-        </p:spPr>
-        <p:style>
-          <a:lnRef idx="1">
-            <a:schemeClr val="accent1"/>
-          </a:lnRef>
-          <a:fillRef idx="3">
-            <a:schemeClr val="accent1"/>
-          </a:fillRef>
-          <a:effectRef idx="2">
-            <a:schemeClr val="accent1"/>
-          </a:effectRef>
-          <a:fontRef idx="minor">
-            <a:schemeClr val="lt1"/>
-          </a:fontRef>
-        </p:style>
-        <p:txBody>
-          <a:bodyPr wrap="none" rtlCol="0" anchor="ctr"/>
-          <a:lstStyle/>
-          <a:p>
-            <a:pPr algn="ctr"/>
-            <a:r>
-              <a:rPr sz="2800" b="1">
-                <a:solidFill>
-                  <a:srgbClr val="FFFFFF"/>
-                </a:solidFill>
-              </a:rPr>
-              <a:t>!</a:t>
-            </a:r>
-          </a:p>
-        </p:txBody>
-      </p:sp>
-      <p:sp>
-        <p:nvSpPr>
-          <p:cNvPr id="3" name="TextBox 2"/>
-          <p:cNvSpPr txBox="1"/>
-          <p:nvPr/>
-        </p:nvSpPr>
-        <p:spPr>
-          <a:xfrm>
-            <a:off x="914400" y="1371600"/>
-            <a:ext cx="10363200" cy="457200"/>
-          </a:xfrm>
-          <a:prstGeom prst="rect">
-            <a:avLst/>
-          </a:prstGeom>
-          <a:noFill/>
-        </p:spPr>
-        <p:txBody>
-          <a:bodyPr wrap="none">
-            <a:spAutoFit/>
-          </a:bodyPr>
-          <a:lstStyle/>
-          <a:p>
-            <a:pPr algn="ctr"/>
-            <a:r>
-              <a:rPr sz="1800" b="1">
-                <a:solidFill>
-                  <a:srgbClr val="8A3B3F"/>
-                </a:solidFill>
-              </a:rPr>
-              <a:t>VERIFICAÇÃO RÁPIDA</a:t>
-            </a:r>
-          </a:p>
-        </p:txBody>
-      </p:sp>
-      <p:sp>
-        <p:nvSpPr>
-          <p:cNvPr id="4" name="TextBox 3"/>
-          <p:cNvSpPr txBox="1"/>
-          <p:nvPr/>
-        </p:nvSpPr>
-        <p:spPr>
-          <a:xfrm>
-            <a:off x="1188720" y="2103120"/>
-            <a:ext cx="9814560" cy="1600000"/>
-          </a:xfrm>
-          <a:prstGeom prst="rect">
-            <a:avLst/>
-          </a:prstGeom>
-          <a:noFill/>
-        </p:spPr>
-        <p:txBody>
-          <a:bodyPr wrap="square">
-            <a:spAutoFit/>
-          </a:bodyPr>
-          <a:lstStyle/>
-          <a:p>
-            <a:pPr algn="ctr">
-              <a:lnSpc>
-                <a:spcPct val="150000"/>
-              </a:lnSpc>
-            </a:pPr>
-            <a:r>
-              <a:rPr sz="2800" b="1">
-                <a:solidFill>
-                  <a:srgbClr val="3D1F21"/>
-                </a:solidFill>
-              </a:rPr>
-              <a:t>"Por que a Esperança da Bernoulli, aqui, é igual a p — sem precisar de nenhuma soma?"</a:t>
-            </a:r>
-          </a:p>
-        </p:txBody>
-      </p:sp>
-      <p:sp>
-        <p:nvSpPr>
-          <p:cNvPr id="5" name="TextBox 4"/>
-          <p:cNvSpPr txBox="1"/>
-          <p:nvPr/>
-        </p:nvSpPr>
-        <p:spPr>
-          <a:xfrm>
-            <a:off x="914400" y="5577840"/>
-            <a:ext cx="10363200" cy="457200"/>
-          </a:xfrm>
-          <a:prstGeom prst="rect">
-            <a:avLst/>
-          </a:prstGeom>
-          <a:noFill/>
-        </p:spPr>
-        <p:txBody>
-          <a:bodyPr wrap="none">
-            <a:spAutoFit/>
-          </a:bodyPr>
-          <a:lstStyle/>
-          <a:p>
-            <a:pPr algn="ctr"/>
-            <a:r>
-              <a:rPr sz="1600" i="1">
-                <a:solidFill>
-                  <a:srgbClr val="8A5C5E"/>
-                </a:solidFill>
-              </a:rPr>
-              <a:t>Sorteie um aluno antes de continuar</a:t>
-            </a:r>
-          </a:p>
-        </p:txBody>
-      </p:sp>
-      <p:sp>
-        <p:nvSpPr>
-          <p:cNvPr id="6" name="TextBox 5"/>
-          <p:cNvSpPr txBox="1"/>
-          <p:nvPr/>
-        </p:nvSpPr>
-        <p:spPr>
-          <a:xfrm>
-            <a:off x="361188" y="6463893"/>
-            <a:ext cx="7772400" cy="308152"/>
-          </a:xfrm>
-          <a:prstGeom prst="rect">
-            <a:avLst/>
-          </a:prstGeom>
-          <a:noFill/>
-        </p:spPr>
-        <p:txBody>
-          <a:bodyPr wrap="none">
-            <a:spAutoFit/>
-          </a:bodyPr>
-          <a:lstStyle/>
-          <a:p>
-            <a:pPr algn="l"/>
-            <a:r>
-              <a:rPr sz="1400">
-                <a:solidFill>
-                  <a:srgbClr val="595959"/>
-                </a:solidFill>
-              </a:rPr>
-              <a:t>CEA055 - Estatística e Probabilidade - Professor: Marcos Goulart Lima</a:t>
-            </a:r>
-          </a:p>
-        </p:txBody>
-      </p:sp>
-    </p:spTree>
-  </p:cSld>
-  <p:clrMapOvr>
-    <a:masterClrMapping/>
-  </p:clrMapOvr>
-</p:sld>
-</file>
-
-<file path=ppt/slides/slide12.xml><?xml version="1.0" encoding="utf-8"?>
-<p:sld xmlns:a="http://schemas.openxmlformats.org/drawingml/2006/main" xmlns:r="http://schemas.openxmlformats.org/officeDocument/2006/relationships" xmlns:p="http://schemas.openxmlformats.org/presentationml/2006/main">
-  <p:cSld>
-    <p:spTree>
-      <p:nvGrpSpPr>
-        <p:cNvPr id="1" name=""/>
-        <p:cNvGrpSpPr/>
-        <p:nvPr/>
-      </p:nvGrpSpPr>
-      <p:grpSpPr>
-        <a:xfrm>
-          <a:off x="0" y="0"/>
-          <a:ext cx="0" cy="0"/>
-          <a:chOff x="0" y="0"/>
-          <a:chExt cx="0" cy="0"/>
-        </a:xfrm>
-      </p:grpSpPr>
-      <mc:AlternateContent xmlns:mc="http://schemas.openxmlformats.org/markup-compatibility/2006">
-        <mc:Choice xmlns:a14="http://schemas.microsoft.com/office/drawing/2010/main" Requires="a14">
           <p:sp>
             <p:nvSpPr>
               <p:cNvPr id="6" name="CaixaDeTexto 5">
@@ -5490,7 +4398,7 @@
             </p:txBody>
           </p:sp>
         </mc:Choice>
-        <mc:Fallback>
+        <mc:Fallback xmlns="">
           <p:sp>
             <p:nvSpPr>
               <p:cNvPr id="6" name="CaixaDeTexto 5">
@@ -5583,7 +4491,7 @@
 </p:sld>
 </file>
 
-<file path=ppt/slides/slide13.xml><?xml version="1.0" encoding="utf-8"?>
+<file path=ppt/slides/slide11.xml><?xml version="1.0" encoding="utf-8"?>
 <p:sld xmlns:a="http://schemas.openxmlformats.org/drawingml/2006/main" xmlns:r="http://schemas.openxmlformats.org/officeDocument/2006/relationships" xmlns:p="http://schemas.openxmlformats.org/presentationml/2006/main">
   <p:cSld>
     <p:spTree>
@@ -5933,7 +4841,7 @@
 </p:sld>
 </file>
 
-<file path=ppt/slides/slide14.xml><?xml version="1.0" encoding="utf-8"?>
+<file path=ppt/slides/slide12.xml><?xml version="1.0" encoding="utf-8"?>
 <p:sld xmlns:a="http://schemas.openxmlformats.org/drawingml/2006/main" xmlns:r="http://schemas.openxmlformats.org/officeDocument/2006/relationships" xmlns:p="http://schemas.openxmlformats.org/presentationml/2006/main">
   <p:cSld>
     <p:spTree>
@@ -6292,7 +5200,7 @@
 </p:sld>
 </file>
 
-<file path=ppt/slides/slide15.xml><?xml version="1.0" encoding="utf-8"?>
+<file path=ppt/slides/slide13.xml><?xml version="1.0" encoding="utf-8"?>
 <p:sld xmlns:a="http://schemas.openxmlformats.org/drawingml/2006/main" xmlns:r="http://schemas.openxmlformats.org/officeDocument/2006/relationships" xmlns:p="http://schemas.openxmlformats.org/presentationml/2006/main">
   <p:cSld>
     <p:spTree>
@@ -6747,7 +5655,7 @@
 </p:sld>
 </file>
 
-<file path=ppt/slides/slide16.xml><?xml version="1.0" encoding="utf-8"?>
+<file path=ppt/slides/slide14.xml><?xml version="1.0" encoding="utf-8"?>
 <p:sld xmlns:a="http://schemas.openxmlformats.org/drawingml/2006/main" xmlns:r="http://schemas.openxmlformats.org/officeDocument/2006/relationships" xmlns:p="http://schemas.openxmlformats.org/presentationml/2006/main">
   <p:cSld>
     <p:spTree>
@@ -7001,7 +5909,7 @@
 </p:sld>
 </file>
 
-<file path=ppt/slides/slide17.xml><?xml version="1.0" encoding="utf-8"?>
+<file path=ppt/slides/slide15.xml><?xml version="1.0" encoding="utf-8"?>
 <p:sld xmlns:a="http://schemas.openxmlformats.org/drawingml/2006/main" xmlns:r="http://schemas.openxmlformats.org/officeDocument/2006/relationships" xmlns:p="http://schemas.openxmlformats.org/presentationml/2006/main">
   <p:cSld>
     <p:spTree>
@@ -7516,231 +6424,7 @@
 </p:sld>
 </file>
 
-<file path=ppt/slides/slide18.xml><?xml version="1.0" encoding="utf-8"?>
-<p:sld xmlns:a="http://schemas.openxmlformats.org/drawingml/2006/main" xmlns:r="http://schemas.openxmlformats.org/officeDocument/2006/relationships" xmlns:p="http://schemas.openxmlformats.org/presentationml/2006/main">
-  <p:cSld>
-    <p:bg>
-      <p:bgPr>
-        <a:solidFill>
-          <a:srgbClr val="E6CCCC"/>
-        </a:solidFill>
-        <a:effectLst/>
-      </p:bgPr>
-    </p:bg>
-    <p:spTree>
-      <p:nvGrpSpPr>
-        <p:cNvPr id="1" name=""/>
-        <p:cNvGrpSpPr/>
-        <p:nvPr/>
-      </p:nvGrpSpPr>
-      <p:grpSpPr>
-        <a:xfrm>
-          <a:off x="0" y="0"/>
-          <a:ext cx="0" cy="0"/>
-          <a:chOff x="0" y="0"/>
-          <a:chExt cx="0" cy="0"/>
-        </a:xfrm>
-      </p:grpSpPr>
-      <p:sp>
-        <p:nvSpPr>
-          <p:cNvPr id="2" name="Oval 1"/>
-          <p:cNvSpPr/>
-          <p:nvPr/>
-        </p:nvSpPr>
-        <p:spPr>
-          <a:xfrm>
-            <a:off x="5775960" y="457200"/>
-            <a:ext cx="640080" cy="640080"/>
-          </a:xfrm>
-          <a:prstGeom prst="ellipse">
-            <a:avLst/>
-          </a:prstGeom>
-          <a:solidFill>
-            <a:srgbClr val="8A3B3F"/>
-          </a:solidFill>
-          <a:ln>
-            <a:noFill/>
-          </a:ln>
-        </p:spPr>
-        <p:style>
-          <a:lnRef idx="1">
-            <a:schemeClr val="accent1"/>
-          </a:lnRef>
-          <a:fillRef idx="3">
-            <a:schemeClr val="accent1"/>
-          </a:fillRef>
-          <a:effectRef idx="2">
-            <a:schemeClr val="accent1"/>
-          </a:effectRef>
-          <a:fontRef idx="minor">
-            <a:schemeClr val="lt1"/>
-          </a:fontRef>
-        </p:style>
-        <p:txBody>
-          <a:bodyPr wrap="none" rtlCol="0" anchor="ctr"/>
-          <a:lstStyle/>
-          <a:p>
-            <a:pPr algn="ctr"/>
-            <a:r>
-              <a:rPr sz="2800" b="1">
-                <a:solidFill>
-                  <a:srgbClr val="FFFFFF"/>
-                </a:solidFill>
-              </a:rPr>
-              <a:t>!</a:t>
-            </a:r>
-          </a:p>
-        </p:txBody>
-      </p:sp>
-      <p:sp>
-        <p:nvSpPr>
-          <p:cNvPr id="3" name="TextBox 2"/>
-          <p:cNvSpPr txBox="1"/>
-          <p:nvPr/>
-        </p:nvSpPr>
-        <p:spPr>
-          <a:xfrm>
-            <a:off x="914400" y="1371600"/>
-            <a:ext cx="10363200" cy="457200"/>
-          </a:xfrm>
-          <a:prstGeom prst="rect">
-            <a:avLst/>
-          </a:prstGeom>
-          <a:noFill/>
-        </p:spPr>
-        <p:txBody>
-          <a:bodyPr wrap="none">
-            <a:spAutoFit/>
-          </a:bodyPr>
-          <a:lstStyle/>
-          <a:p>
-            <a:pPr algn="ctr"/>
-            <a:r>
-              <a:rPr sz="1800" b="1">
-                <a:solidFill>
-                  <a:srgbClr val="8A3B3F"/>
-                </a:solidFill>
-              </a:rPr>
-              <a:t>VERIFICAÇÃO RÁPIDA</a:t>
-            </a:r>
-          </a:p>
-        </p:txBody>
-      </p:sp>
-      <p:sp>
-        <p:nvSpPr>
-          <p:cNvPr id="4" name="TextBox 3"/>
-          <p:cNvSpPr txBox="1"/>
-          <p:nvPr/>
-        </p:nvSpPr>
-        <p:spPr>
-          <a:xfrm>
-            <a:off x="1188720" y="2103120"/>
-            <a:ext cx="9814560" cy="2800000"/>
-          </a:xfrm>
-          <a:prstGeom prst="rect">
-            <a:avLst/>
-          </a:prstGeom>
-          <a:noFill/>
-        </p:spPr>
-        <p:txBody>
-          <a:bodyPr wrap="square">
-            <a:spAutoFit/>
-          </a:bodyPr>
-          <a:lstStyle/>
-          <a:p>
-            <a:pPr algn="ctr">
-              <a:lnSpc>
-                <a:spcPct val="150000"/>
-              </a:lnSpc>
-            </a:pPr>
-            <a:r>
-              <a:rPr sz="2400" b="1">
-                <a:solidFill>
-                  <a:srgbClr val="3D1F21"/>
-                </a:solidFill>
-              </a:rPr>
-              <a:t>"Por que a probabilidade de o primeiro "6" aparecer só no 15º lançamento é tão menor do que aparecer logo nos primeiros lançamentos — mesmo a chance de sair "6" sendo sempre a mesma (1/6) em cada tentativa?"</a:t>
-            </a:r>
-          </a:p>
-        </p:txBody>
-      </p:sp>
-      <p:sp>
-        <p:nvSpPr>
-          <p:cNvPr id="5" name="TextBox 4"/>
-          <p:cNvSpPr txBox="1"/>
-          <p:nvPr/>
-        </p:nvSpPr>
-        <p:spPr>
-          <a:xfrm>
-            <a:off x="914400" y="5577840"/>
-            <a:ext cx="10363200" cy="457200"/>
-          </a:xfrm>
-          <a:prstGeom prst="rect">
-            <a:avLst/>
-          </a:prstGeom>
-          <a:noFill/>
-        </p:spPr>
-        <p:txBody>
-          <a:bodyPr wrap="none">
-            <a:spAutoFit/>
-          </a:bodyPr>
-          <a:lstStyle/>
-          <a:p>
-            <a:pPr algn="ctr"/>
-            <a:r>
-              <a:rPr sz="1600" i="1">
-                <a:solidFill>
-                  <a:srgbClr val="8A5C5E"/>
-                </a:solidFill>
-              </a:rPr>
-              <a:t>Sorteie um aluno antes de continuar</a:t>
-            </a:r>
-          </a:p>
-        </p:txBody>
-      </p:sp>
-      <p:sp>
-        <p:nvSpPr>
-          <p:cNvPr id="6" name="TextBox 5"/>
-          <p:cNvSpPr txBox="1"/>
-          <p:nvPr/>
-        </p:nvSpPr>
-        <p:spPr>
-          <a:xfrm>
-            <a:off x="361188" y="6463893"/>
-            <a:ext cx="7772400" cy="308152"/>
-          </a:xfrm>
-          <a:prstGeom prst="rect">
-            <a:avLst/>
-          </a:prstGeom>
-          <a:noFill/>
-        </p:spPr>
-        <p:txBody>
-          <a:bodyPr wrap="none">
-            <a:spAutoFit/>
-          </a:bodyPr>
-          <a:lstStyle/>
-          <a:p>
-            <a:pPr algn="l"/>
-            <a:r>
-              <a:rPr sz="1400">
-                <a:solidFill>
-                  <a:srgbClr val="595959"/>
-                </a:solidFill>
-              </a:rPr>
-              <a:t>CEA055 - Estatística e Probabilidade - Professor: Marcos Goulart Lima</a:t>
-            </a:r>
-          </a:p>
-        </p:txBody>
-      </p:sp>
-    </p:spTree>
-  </p:cSld>
-  <p:clrMapOvr>
-    <a:masterClrMapping/>
-  </p:clrMapOvr>
-</p:sld>
-</file>
-
-<file path=ppt/slides/slide19.xml><?xml version="1.0" encoding="utf-8"?>
+<file path=ppt/slides/slide16.xml><?xml version="1.0" encoding="utf-8"?>
 <p:sld xmlns:a="http://schemas.openxmlformats.org/drawingml/2006/main" xmlns:r="http://schemas.openxmlformats.org/officeDocument/2006/relationships" xmlns:p="http://schemas.openxmlformats.org/presentationml/2006/main">
   <p:cSld>
     <p:spTree>
@@ -8071,552 +6755,7 @@
 </p:sld>
 </file>
 
-<file path=ppt/slides/slide2.xml><?xml version="1.0" encoding="utf-8"?>
-<p:sld xmlns:a="http://schemas.openxmlformats.org/drawingml/2006/main" xmlns:r="http://schemas.openxmlformats.org/officeDocument/2006/relationships" xmlns:p="http://schemas.openxmlformats.org/presentationml/2006/main">
-  <p:cSld>
-    <p:spTree>
-      <p:nvGrpSpPr>
-        <p:cNvPr id="1" name=""/>
-        <p:cNvGrpSpPr/>
-        <p:nvPr/>
-      </p:nvGrpSpPr>
-      <p:grpSpPr>
-        <a:xfrm>
-          <a:off x="0" y="0"/>
-          <a:ext cx="0" cy="0"/>
-          <a:chOff x="0" y="0"/>
-          <a:chExt cx="0" cy="0"/>
-        </a:xfrm>
-      </p:grpSpPr>
-      <mc:AlternateContent xmlns:mc="http://schemas.openxmlformats.org/markup-compatibility/2006" xmlns:a14="http://schemas.microsoft.com/office/drawing/2010/main">
-        <mc:Choice Requires="a14">
-          <p:sp>
-            <p:nvSpPr>
-              <p:cNvPr id="6" name="CaixaDeTexto 5">
-                <a:extLst>
-                  <a:ext uri="{FF2B5EF4-FFF2-40B4-BE49-F238E27FC236}">
-                    <a16:creationId xmlns:a16="http://schemas.microsoft.com/office/drawing/2014/main" id="{720B10DA-C761-4DEE-8D86-E170E1C2E981}"/>
-                  </a:ext>
-                </a:extLst>
-              </p:cNvPr>
-              <p:cNvSpPr txBox="1"/>
-              <p:nvPr/>
-            </p:nvSpPr>
-            <p:spPr>
-              <a:xfrm>
-                <a:off x="794601" y="713754"/>
-                <a:ext cx="10067277" cy="5574090"/>
-              </a:xfrm>
-              <a:prstGeom prst="rect">
-                <a:avLst/>
-              </a:prstGeom>
-              <a:noFill/>
-            </p:spPr>
-            <p:txBody>
-              <a:bodyPr wrap="square" rtlCol="0">
-                <a:spAutoFit/>
-              </a:bodyPr>
-              <a:lstStyle/>
-              <a:p>
-                <a:pPr>
-                  <a:lnSpc>
-                    <a:spcPct val="150000"/>
-                  </a:lnSpc>
-                </a:pPr>
-                <a:r>
-                  <a:rPr lang="pt-BR" sz="2400" b="1" dirty="0"/>
-                  <a:t>Distribuição Uniforme Discreta</a:t>
-                </a:r>
-              </a:p>
-              <a:p>
-                <a:pPr marL="285737" indent="-285737">
-                  <a:lnSpc>
-                    <a:spcPct val="150000"/>
-                  </a:lnSpc>
-                  <a:buFont typeface="Arial" panose="020B0604020202020204" pitchFamily="34" charset="0"/>
-                  <a:buChar char="•"/>
-                </a:pPr>
-                <a:endParaRPr lang="pt-BR" sz="2400" dirty="0"/>
-              </a:p>
-              <a:p>
-                <a:pPr>
-                  <a:lnSpc>
-                    <a:spcPct val="150000"/>
-                  </a:lnSpc>
-                </a:pPr>
-                <a:r>
-                  <a:rPr lang="pt-BR" sz="2400" b="1" dirty="0"/>
-                  <a:t>Definição</a:t>
-                </a:r>
-              </a:p>
-              <a:p>
-                <a:pPr>
-                  <a:lnSpc>
-                    <a:spcPct val="150000"/>
-                  </a:lnSpc>
-                </a:pPr>
-                <a:r>
-                  <a:rPr lang="pt-BR" sz="2400" dirty="0"/>
-                  <a:t>A v.a. discreta </a:t>
-                </a:r>
-                <a14:m>
-                  <m:oMath xmlns:m="http://schemas.openxmlformats.org/officeDocument/2006/math">
-                    <m:r>
-                      <a:rPr lang="pt-BR" sz="2400" b="0" i="1" smtClean="0">
-                        <a:latin typeface="Cambria Math" panose="02040503050406030204" pitchFamily="18" charset="0"/>
-                      </a:rPr>
-                      <m:t>𝑋</m:t>
-                    </m:r>
-                  </m:oMath>
-                </a14:m>
-                <a:r>
-                  <a:rPr lang="pt-BR" sz="2400" dirty="0"/>
-                  <a:t>, assumindo os valores </a:t>
-                </a:r>
-                <a14:m>
-                  <m:oMath xmlns:m="http://schemas.openxmlformats.org/officeDocument/2006/math">
-                    <m:sSub>
-                      <m:sSubPr>
-                        <m:ctrlPr>
-                          <a:rPr lang="pt-BR" sz="2400" b="0" i="1" dirty="0" smtClean="0">
-                            <a:latin typeface="Cambria Math" panose="02040503050406030204" pitchFamily="18" charset="0"/>
-                          </a:rPr>
-                        </m:ctrlPr>
-                      </m:sSubPr>
-                      <m:e>
-                        <m:r>
-                          <a:rPr lang="pt-BR" sz="2400" i="1" dirty="0" smtClean="0">
-                            <a:latin typeface="Cambria Math" panose="02040503050406030204" pitchFamily="18" charset="0"/>
-                          </a:rPr>
-                          <m:t>𝑥</m:t>
-                        </m:r>
-                      </m:e>
-                      <m:sub>
-                        <m:r>
-                          <a:rPr lang="pt-BR" sz="2400" i="1" dirty="0" smtClean="0">
-                            <a:latin typeface="Cambria Math" panose="02040503050406030204" pitchFamily="18" charset="0"/>
-                          </a:rPr>
-                          <m:t>1</m:t>
-                        </m:r>
-                      </m:sub>
-                    </m:sSub>
-                    <m:r>
-                      <a:rPr lang="pt-BR" sz="2400" i="1" dirty="0" smtClean="0">
-                        <a:latin typeface="Cambria Math" panose="02040503050406030204" pitchFamily="18" charset="0"/>
-                      </a:rPr>
-                      <m:t>, …, </m:t>
-                    </m:r>
-                    <m:sSub>
-                      <m:sSubPr>
-                        <m:ctrlPr>
-                          <a:rPr lang="pt-BR" sz="2400" b="0" i="1" dirty="0" smtClean="0">
-                            <a:latin typeface="Cambria Math" panose="02040503050406030204" pitchFamily="18" charset="0"/>
-                          </a:rPr>
-                        </m:ctrlPr>
-                      </m:sSubPr>
-                      <m:e>
-                        <m:r>
-                          <a:rPr lang="pt-BR" sz="2400" i="1" dirty="0" err="1" smtClean="0">
-                            <a:latin typeface="Cambria Math" panose="02040503050406030204" pitchFamily="18" charset="0"/>
-                          </a:rPr>
-                          <m:t>𝑥</m:t>
-                        </m:r>
-                      </m:e>
-                      <m:sub>
-                        <m:r>
-                          <a:rPr lang="pt-BR" sz="2400" i="1" dirty="0" err="1" smtClean="0">
-                            <a:latin typeface="Cambria Math" panose="02040503050406030204" pitchFamily="18" charset="0"/>
-                          </a:rPr>
-                          <m:t>𝑘</m:t>
-                        </m:r>
-                      </m:sub>
-                    </m:sSub>
-                  </m:oMath>
-                </a14:m>
-                <a:r>
-                  <a:rPr lang="pt-BR" sz="2400" dirty="0"/>
-                  <a:t>, tem distribuição uniforme se, e somente se, </a:t>
-                </a:r>
-              </a:p>
-              <a:p>
-                <a:pPr>
-                  <a:lnSpc>
-                    <a:spcPct val="150000"/>
-                  </a:lnSpc>
-                </a:pPr>
-                <a14:m>
-                  <m:oMathPara xmlns:m="http://schemas.openxmlformats.org/officeDocument/2006/math">
-                    <m:oMathParaPr>
-                      <m:jc m:val="centerGroup"/>
-                    </m:oMathParaPr>
-                    <m:oMath xmlns:m="http://schemas.openxmlformats.org/officeDocument/2006/math">
-                      <m:r>
-                        <a:rPr lang="pt-BR" sz="2400" i="1" dirty="0" smtClean="0">
-                          <a:latin typeface="Cambria Math" panose="02040503050406030204" pitchFamily="18" charset="0"/>
-                        </a:rPr>
-                        <m:t>𝑃</m:t>
-                      </m:r>
-                      <m:d>
-                        <m:dPr>
-                          <m:ctrlPr>
-                            <a:rPr lang="pt-BR" sz="2400" i="1" dirty="0" smtClean="0">
-                              <a:latin typeface="Cambria Math" panose="02040503050406030204" pitchFamily="18" charset="0"/>
-                            </a:rPr>
-                          </m:ctrlPr>
-                        </m:dPr>
-                        <m:e>
-                          <m:r>
-                            <a:rPr lang="pt-BR" sz="2400" i="1" dirty="0" smtClean="0">
-                              <a:latin typeface="Cambria Math" panose="02040503050406030204" pitchFamily="18" charset="0"/>
-                            </a:rPr>
-                            <m:t>𝑋</m:t>
-                          </m:r>
-                          <m:r>
-                            <a:rPr lang="pt-BR" sz="2400" i="1" dirty="0" smtClean="0">
-                              <a:latin typeface="Cambria Math" panose="02040503050406030204" pitchFamily="18" charset="0"/>
-                            </a:rPr>
-                            <m:t> = </m:t>
-                          </m:r>
-                          <m:sSub>
-                            <m:sSubPr>
-                              <m:ctrlPr>
-                                <a:rPr lang="pt-BR" sz="2400" b="0" i="1" dirty="0" smtClean="0">
-                                  <a:latin typeface="Cambria Math" panose="02040503050406030204" pitchFamily="18" charset="0"/>
-                                </a:rPr>
-                              </m:ctrlPr>
-                            </m:sSubPr>
-                            <m:e>
-                              <m:r>
-                                <a:rPr lang="pt-BR" sz="2400" i="1" dirty="0" smtClean="0">
-                                  <a:latin typeface="Cambria Math" panose="02040503050406030204" pitchFamily="18" charset="0"/>
-                                </a:rPr>
-                                <m:t>𝑥</m:t>
-                              </m:r>
-                            </m:e>
-                            <m:sub>
-                              <m:r>
-                                <a:rPr lang="pt-BR" sz="2400" b="0" i="1" dirty="0" smtClean="0">
-                                  <a:latin typeface="Cambria Math" panose="02040503050406030204" pitchFamily="18" charset="0"/>
-                                </a:rPr>
-                                <m:t>𝑖</m:t>
-                              </m:r>
-                            </m:sub>
-                          </m:sSub>
-                        </m:e>
-                      </m:d>
-                      <m:r>
-                        <a:rPr lang="pt-BR" sz="2400" i="1" dirty="0" smtClean="0">
-                          <a:latin typeface="Cambria Math" panose="02040503050406030204" pitchFamily="18" charset="0"/>
-                        </a:rPr>
-                        <m:t>= </m:t>
-                      </m:r>
-                      <m:r>
-                        <a:rPr lang="pt-BR" sz="2400" i="1" dirty="0" smtClean="0">
-                          <a:latin typeface="Cambria Math" panose="02040503050406030204" pitchFamily="18" charset="0"/>
-                        </a:rPr>
-                        <m:t>𝑝</m:t>
-                      </m:r>
-                      <m:d>
-                        <m:dPr>
-                          <m:ctrlPr>
-                            <a:rPr lang="pt-BR" sz="2400" i="1" dirty="0" smtClean="0">
-                              <a:latin typeface="Cambria Math" panose="02040503050406030204" pitchFamily="18" charset="0"/>
-                            </a:rPr>
-                          </m:ctrlPr>
-                        </m:dPr>
-                        <m:e>
-                          <m:sSub>
-                            <m:sSubPr>
-                              <m:ctrlPr>
-                                <a:rPr lang="pt-BR" sz="2400" b="0" i="1" dirty="0" smtClean="0">
-                                  <a:latin typeface="Cambria Math" panose="02040503050406030204" pitchFamily="18" charset="0"/>
-                                </a:rPr>
-                              </m:ctrlPr>
-                            </m:sSubPr>
-                            <m:e>
-                              <m:r>
-                                <a:rPr lang="pt-BR" sz="2400" i="1" dirty="0" smtClean="0">
-                                  <a:latin typeface="Cambria Math" panose="02040503050406030204" pitchFamily="18" charset="0"/>
-                                </a:rPr>
-                                <m:t>𝑥</m:t>
-                              </m:r>
-                            </m:e>
-                            <m:sub>
-                              <m:r>
-                                <a:rPr lang="pt-BR" sz="2400" i="1" dirty="0" smtClean="0">
-                                  <a:latin typeface="Cambria Math" panose="02040503050406030204" pitchFamily="18" charset="0"/>
-                                </a:rPr>
-                                <m:t>𝑖</m:t>
-                              </m:r>
-                            </m:sub>
-                          </m:sSub>
-                        </m:e>
-                      </m:d>
-                      <m:r>
-                        <a:rPr lang="pt-BR" sz="2400" i="1" dirty="0" smtClean="0">
-                          <a:latin typeface="Cambria Math" panose="02040503050406030204" pitchFamily="18" charset="0"/>
-                        </a:rPr>
-                        <m:t>= </m:t>
-                      </m:r>
-                      <m:r>
-                        <a:rPr lang="pt-BR" sz="2400" i="1" dirty="0" smtClean="0">
-                          <a:latin typeface="Cambria Math" panose="02040503050406030204" pitchFamily="18" charset="0"/>
-                        </a:rPr>
-                        <m:t>𝑝</m:t>
-                      </m:r>
-                      <m:r>
-                        <a:rPr lang="pt-BR" sz="2400" i="1" dirty="0" smtClean="0">
-                          <a:latin typeface="Cambria Math" panose="02040503050406030204" pitchFamily="18" charset="0"/>
-                        </a:rPr>
-                        <m:t> = 1/</m:t>
-                      </m:r>
-                      <m:r>
-                        <a:rPr lang="pt-BR" sz="2400" b="0" i="1" dirty="0" smtClean="0">
-                          <a:latin typeface="Cambria Math" panose="02040503050406030204" pitchFamily="18" charset="0"/>
-                        </a:rPr>
-                        <m:t>𝑘</m:t>
-                      </m:r>
-                      <m:r>
-                        <a:rPr lang="pt-BR" sz="2400" i="1" dirty="0" smtClean="0">
-                          <a:latin typeface="Cambria Math" panose="02040503050406030204" pitchFamily="18" charset="0"/>
-                        </a:rPr>
-                        <m:t>,</m:t>
-                      </m:r>
-                    </m:oMath>
-                  </m:oMathPara>
-                </a14:m>
-                <a:endParaRPr lang="pt-BR" sz="2400" dirty="0"/>
-              </a:p>
-              <a:p>
-                <a:pPr>
-                  <a:lnSpc>
-                    <a:spcPct val="150000"/>
-                  </a:lnSpc>
-                </a:pPr>
-                <a:endParaRPr lang="pt-BR" sz="2400" dirty="0"/>
-              </a:p>
-              <a:p>
-                <a:pPr>
-                  <a:lnSpc>
-                    <a:spcPct val="150000"/>
-                  </a:lnSpc>
-                </a:pPr>
-                <a:r>
-                  <a:rPr lang="pt-BR" sz="2400" dirty="0"/>
-                  <a:t>para todo </a:t>
-                </a:r>
-                <a14:m>
-                  <m:oMath xmlns:m="http://schemas.openxmlformats.org/officeDocument/2006/math">
-                    <m:r>
-                      <a:rPr lang="pt-BR" sz="2400" i="1" dirty="0" smtClean="0">
-                        <a:latin typeface="Cambria Math" panose="02040503050406030204" pitchFamily="18" charset="0"/>
-                      </a:rPr>
-                      <m:t>𝑖</m:t>
-                    </m:r>
-                    <m:r>
-                      <a:rPr lang="pt-BR" sz="2400" i="1" dirty="0" smtClean="0">
-                        <a:latin typeface="Cambria Math" panose="02040503050406030204" pitchFamily="18" charset="0"/>
-                      </a:rPr>
-                      <m:t> = 1, 2, …, </m:t>
-                    </m:r>
-                    <m:r>
-                      <a:rPr lang="pt-BR" sz="2400" i="1" dirty="0" smtClean="0">
-                        <a:latin typeface="Cambria Math" panose="02040503050406030204" pitchFamily="18" charset="0"/>
-                      </a:rPr>
-                      <m:t>𝑘</m:t>
-                    </m:r>
-                    <m:r>
-                      <a:rPr lang="pt-BR" sz="2400" i="1" dirty="0" smtClean="0">
-                        <a:latin typeface="Cambria Math" panose="02040503050406030204" pitchFamily="18" charset="0"/>
-                      </a:rPr>
-                      <m:t>.</m:t>
-                    </m:r>
-                  </m:oMath>
-                </a14:m>
-                <a:endParaRPr lang="pt-BR" sz="2400" dirty="0"/>
-              </a:p>
-              <a:p>
-                <a:pPr>
-                  <a:lnSpc>
-                    <a:spcPct val="150000"/>
-                  </a:lnSpc>
-                </a:pPr>
-                <a:endParaRPr lang="pt-BR" sz="2400" b="1" dirty="0"/>
-              </a:p>
-              <a:p>
-                <a:pPr>
-                  <a:lnSpc>
-                    <a:spcPct val="150000"/>
-                  </a:lnSpc>
-                </a:pPr>
-                <a:r>
-                  <a:rPr lang="pt-BR" sz="2400" b="1" dirty="0"/>
-                  <a:t>Notação: </a:t>
-                </a:r>
-                <a14:m>
-                  <m:oMath xmlns:m="http://schemas.openxmlformats.org/officeDocument/2006/math">
-                    <m:r>
-                      <m:rPr>
-                        <m:sty m:val="p"/>
-                      </m:rPr>
-                      <a:rPr lang="pt-BR" sz="2400" b="0" i="0" smtClean="0">
-                        <a:latin typeface="Cambria Math" panose="02040503050406030204" pitchFamily="18" charset="0"/>
-                      </a:rPr>
-                      <m:t>X</m:t>
-                    </m:r>
-                    <m:r>
-                      <a:rPr lang="pt-BR" sz="2400" b="0" i="1" smtClean="0">
-                        <a:latin typeface="Cambria Math" panose="02040503050406030204" pitchFamily="18" charset="0"/>
-                      </a:rPr>
-                      <m:t>~</m:t>
-                    </m:r>
-                    <m:sSub>
-                      <m:sSubPr>
-                        <m:ctrlPr>
-                          <a:rPr lang="pt-BR" sz="2400" b="0" i="1" smtClean="0">
-                            <a:latin typeface="Cambria Math" panose="02040503050406030204" pitchFamily="18" charset="0"/>
-                          </a:rPr>
-                        </m:ctrlPr>
-                      </m:sSubPr>
-                      <m:e>
-                        <m:r>
-                          <a:rPr lang="pt-BR" sz="2400" b="0" i="1" smtClean="0">
-                            <a:latin typeface="Cambria Math" panose="02040503050406030204" pitchFamily="18" charset="0"/>
-                          </a:rPr>
-                          <m:t>𝑈</m:t>
-                        </m:r>
-                      </m:e>
-                      <m:sub>
-                        <m:r>
-                          <a:rPr lang="pt-BR" sz="2400" b="0" i="1" smtClean="0">
-                            <a:latin typeface="Cambria Math" panose="02040503050406030204" pitchFamily="18" charset="0"/>
-                          </a:rPr>
-                          <m:t>𝐷</m:t>
-                        </m:r>
-                      </m:sub>
-                    </m:sSub>
-                    <m:r>
-                      <a:rPr lang="pt-BR" sz="2400" b="0" i="1" smtClean="0">
-                        <a:latin typeface="Cambria Math" panose="02040503050406030204" pitchFamily="18" charset="0"/>
-                      </a:rPr>
-                      <m:t>[1,</m:t>
-                    </m:r>
-                    <m:r>
-                      <a:rPr lang="pt-BR" sz="2400" b="0" i="1" smtClean="0">
-                        <a:latin typeface="Cambria Math" panose="02040503050406030204" pitchFamily="18" charset="0"/>
-                      </a:rPr>
-                      <m:t>𝑘</m:t>
-                    </m:r>
-                    <m:r>
-                      <a:rPr lang="pt-BR" sz="2400" b="0" i="1" smtClean="0">
-                        <a:latin typeface="Cambria Math" panose="02040503050406030204" pitchFamily="18" charset="0"/>
-                      </a:rPr>
-                      <m:t>]</m:t>
-                    </m:r>
-                  </m:oMath>
-                </a14:m>
-                <a:r>
-                  <a:rPr lang="pt-BR" sz="2400" dirty="0"/>
-                  <a:t> (valores de 1 a k.)</a:t>
-                </a:r>
-              </a:p>
-            </p:txBody>
-          </p:sp>
-        </mc:Choice>
-        <mc:Fallback xmlns="">
-          <p:sp>
-            <p:nvSpPr>
-              <p:cNvPr id="6" name="CaixaDeTexto 5">
-                <a:extLst>
-                  <a:ext uri="{FF2B5EF4-FFF2-40B4-BE49-F238E27FC236}">
-                    <a16:creationId xmlns:a16="http://schemas.microsoft.com/office/drawing/2014/main" id="{720B10DA-C761-4DEE-8D86-E170E1C2E981}"/>
-                  </a:ext>
-                </a:extLst>
-              </p:cNvPr>
-              <p:cNvSpPr txBox="1">
-                <a:spLocks noRot="1" noChangeAspect="1" noMove="1" noResize="1" noEditPoints="1" noAdjustHandles="1" noChangeArrowheads="1" noChangeShapeType="1" noTextEdit="1"/>
-              </p:cNvSpPr>
-              <p:nvPr/>
-            </p:nvSpPr>
-            <p:spPr>
-              <a:xfrm>
-                <a:off x="794601" y="713754"/>
-                <a:ext cx="10067277" cy="5574090"/>
-              </a:xfrm>
-              <a:prstGeom prst="rect">
-                <a:avLst/>
-              </a:prstGeom>
-              <a:blipFill>
-                <a:blip r:embed="rId2"/>
-                <a:stretch>
-                  <a:fillRect l="-908" b="-1641"/>
-                </a:stretch>
-              </a:blipFill>
-            </p:spPr>
-            <p:txBody>
-              <a:bodyPr/>
-              <a:lstStyle/>
-              <a:p>
-                <a:r>
-                  <a:rPr lang="pt-BR">
-                    <a:noFill/>
-                  </a:rPr>
-                  <a:t> </a:t>
-                </a:r>
-              </a:p>
-            </p:txBody>
-          </p:sp>
-        </mc:Fallback>
-      </mc:AlternateContent>
-      <p:sp>
-        <p:nvSpPr>
-          <p:cNvPr id="3" name="CaixaDeTexto 2">
-            <a:extLst>
-              <a:ext uri="{FF2B5EF4-FFF2-40B4-BE49-F238E27FC236}">
-                <a16:creationId xmlns:a16="http://schemas.microsoft.com/office/drawing/2014/main" id="{19131A04-B5D6-4211-8B49-4615DE5797E9}"/>
-              </a:ext>
-            </a:extLst>
-          </p:cNvPr>
-          <p:cNvSpPr txBox="1"/>
-          <p:nvPr/>
-        </p:nvSpPr>
-        <p:spPr>
-          <a:xfrm>
-            <a:off x="361395" y="6488668"/>
-            <a:ext cx="7620000" cy="300210"/>
-          </a:xfrm>
-          <a:prstGeom prst="rect">
-            <a:avLst/>
-          </a:prstGeom>
-          <a:noFill/>
-        </p:spPr>
-        <p:txBody>
-          <a:bodyPr wrap="none" rtlCol="0">
-            <a:spAutoFit/>
-          </a:bodyPr>
-          <a:lstStyle/>
-          <a:p>
-            <a:r>
-              <a:rPr lang="pt-BR" sz="1351" dirty="0"/>
-              <a:t>CEA055 - Estatística e Probabilidade - Professor: Marcos Goulart Lima</a:t>
-            </a:r>
-          </a:p>
-        </p:txBody>
-      </p:sp>
-    </p:spTree>
-    <p:extLst>
-      <p:ext uri="{BB962C8B-B14F-4D97-AF65-F5344CB8AC3E}">
-        <p14:creationId xmlns:p14="http://schemas.microsoft.com/office/powerpoint/2010/main" val="2405478703"/>
-      </p:ext>
-    </p:extLst>
-  </p:cSld>
-  <p:clrMapOvr>
-    <a:masterClrMapping/>
-  </p:clrMapOvr>
-</p:sld>
-</file>
-
-<file path=ppt/slides/slide20.xml><?xml version="1.0" encoding="utf-8"?>
+<file path=ppt/slides/slide17.xml><?xml version="1.0" encoding="utf-8"?>
 <p:sld xmlns:a="http://schemas.openxmlformats.org/drawingml/2006/main" xmlns:r="http://schemas.openxmlformats.org/officeDocument/2006/relationships" xmlns:p="http://schemas.openxmlformats.org/presentationml/2006/main">
   <p:cSld>
     <p:spTree>
@@ -9350,7 +7489,7 @@
 </p:sld>
 </file>
 
-<file path=ppt/slides/slide21.xml><?xml version="1.0" encoding="utf-8"?>
+<file path=ppt/slides/slide18.xml><?xml version="1.0" encoding="utf-8"?>
 <p:sld xmlns:a="http://schemas.openxmlformats.org/drawingml/2006/main" xmlns:r="http://schemas.openxmlformats.org/officeDocument/2006/relationships" xmlns:p="http://schemas.openxmlformats.org/presentationml/2006/main">
   <p:cSld>
     <p:spTree>
@@ -9712,7 +7851,7 @@
 </p:sld>
 </file>
 
-<file path=ppt/slides/slide22.xml><?xml version="1.0" encoding="utf-8"?>
+<file path=ppt/slides/slide19.xml><?xml version="1.0" encoding="utf-8"?>
 <p:sld xmlns:a="http://schemas.openxmlformats.org/drawingml/2006/main" xmlns:r="http://schemas.openxmlformats.org/officeDocument/2006/relationships" xmlns:p="http://schemas.openxmlformats.org/presentationml/2006/main">
   <p:cSld>
     <p:spTree>
@@ -10040,7 +8179,552 @@
 </p:sld>
 </file>
 
-<file path=ppt/slides/slide23.xml><?xml version="1.0" encoding="utf-8"?>
+<file path=ppt/slides/slide2.xml><?xml version="1.0" encoding="utf-8"?>
+<p:sld xmlns:a="http://schemas.openxmlformats.org/drawingml/2006/main" xmlns:r="http://schemas.openxmlformats.org/officeDocument/2006/relationships" xmlns:p="http://schemas.openxmlformats.org/presentationml/2006/main">
+  <p:cSld>
+    <p:spTree>
+      <p:nvGrpSpPr>
+        <p:cNvPr id="1" name=""/>
+        <p:cNvGrpSpPr/>
+        <p:nvPr/>
+      </p:nvGrpSpPr>
+      <p:grpSpPr>
+        <a:xfrm>
+          <a:off x="0" y="0"/>
+          <a:ext cx="0" cy="0"/>
+          <a:chOff x="0" y="0"/>
+          <a:chExt cx="0" cy="0"/>
+        </a:xfrm>
+      </p:grpSpPr>
+      <mc:AlternateContent xmlns:mc="http://schemas.openxmlformats.org/markup-compatibility/2006" xmlns:a14="http://schemas.microsoft.com/office/drawing/2010/main">
+        <mc:Choice Requires="a14">
+          <p:sp>
+            <p:nvSpPr>
+              <p:cNvPr id="6" name="CaixaDeTexto 5">
+                <a:extLst>
+                  <a:ext uri="{FF2B5EF4-FFF2-40B4-BE49-F238E27FC236}">
+                    <a16:creationId xmlns:a16="http://schemas.microsoft.com/office/drawing/2014/main" id="{720B10DA-C761-4DEE-8D86-E170E1C2E981}"/>
+                  </a:ext>
+                </a:extLst>
+              </p:cNvPr>
+              <p:cNvSpPr txBox="1"/>
+              <p:nvPr/>
+            </p:nvSpPr>
+            <p:spPr>
+              <a:xfrm>
+                <a:off x="794601" y="713754"/>
+                <a:ext cx="10067277" cy="5574090"/>
+              </a:xfrm>
+              <a:prstGeom prst="rect">
+                <a:avLst/>
+              </a:prstGeom>
+              <a:noFill/>
+            </p:spPr>
+            <p:txBody>
+              <a:bodyPr wrap="square" rtlCol="0">
+                <a:spAutoFit/>
+              </a:bodyPr>
+              <a:lstStyle/>
+              <a:p>
+                <a:pPr>
+                  <a:lnSpc>
+                    <a:spcPct val="150000"/>
+                  </a:lnSpc>
+                </a:pPr>
+                <a:r>
+                  <a:rPr lang="pt-BR" sz="2400" b="1" dirty="0"/>
+                  <a:t>Distribuição Uniforme Discreta</a:t>
+                </a:r>
+              </a:p>
+              <a:p>
+                <a:pPr marL="285737" indent="-285737">
+                  <a:lnSpc>
+                    <a:spcPct val="150000"/>
+                  </a:lnSpc>
+                  <a:buFont typeface="Arial" panose="020B0604020202020204" pitchFamily="34" charset="0"/>
+                  <a:buChar char="•"/>
+                </a:pPr>
+                <a:endParaRPr lang="pt-BR" sz="2400" dirty="0"/>
+              </a:p>
+              <a:p>
+                <a:pPr>
+                  <a:lnSpc>
+                    <a:spcPct val="150000"/>
+                  </a:lnSpc>
+                </a:pPr>
+                <a:r>
+                  <a:rPr lang="pt-BR" sz="2400" b="1" dirty="0"/>
+                  <a:t>Definição</a:t>
+                </a:r>
+              </a:p>
+              <a:p>
+                <a:pPr>
+                  <a:lnSpc>
+                    <a:spcPct val="150000"/>
+                  </a:lnSpc>
+                </a:pPr>
+                <a:r>
+                  <a:rPr lang="pt-BR" sz="2400" dirty="0"/>
+                  <a:t>A v.a. discreta </a:t>
+                </a:r>
+                <a14:m>
+                  <m:oMath xmlns:m="http://schemas.openxmlformats.org/officeDocument/2006/math">
+                    <m:r>
+                      <a:rPr lang="pt-BR" sz="2400" b="0" i="1" smtClean="0">
+                        <a:latin typeface="Cambria Math" panose="02040503050406030204" pitchFamily="18" charset="0"/>
+                      </a:rPr>
+                      <m:t>𝑋</m:t>
+                    </m:r>
+                  </m:oMath>
+                </a14:m>
+                <a:r>
+                  <a:rPr lang="pt-BR" sz="2400" dirty="0"/>
+                  <a:t>, assumindo os valores </a:t>
+                </a:r>
+                <a14:m>
+                  <m:oMath xmlns:m="http://schemas.openxmlformats.org/officeDocument/2006/math">
+                    <m:sSub>
+                      <m:sSubPr>
+                        <m:ctrlPr>
+                          <a:rPr lang="pt-BR" sz="2400" b="0" i="1" dirty="0" smtClean="0">
+                            <a:latin typeface="Cambria Math" panose="02040503050406030204" pitchFamily="18" charset="0"/>
+                          </a:rPr>
+                        </m:ctrlPr>
+                      </m:sSubPr>
+                      <m:e>
+                        <m:r>
+                          <a:rPr lang="pt-BR" sz="2400" i="1" dirty="0" smtClean="0">
+                            <a:latin typeface="Cambria Math" panose="02040503050406030204" pitchFamily="18" charset="0"/>
+                          </a:rPr>
+                          <m:t>𝑥</m:t>
+                        </m:r>
+                      </m:e>
+                      <m:sub>
+                        <m:r>
+                          <a:rPr lang="pt-BR" sz="2400" i="1" dirty="0" smtClean="0">
+                            <a:latin typeface="Cambria Math" panose="02040503050406030204" pitchFamily="18" charset="0"/>
+                          </a:rPr>
+                          <m:t>1</m:t>
+                        </m:r>
+                      </m:sub>
+                    </m:sSub>
+                    <m:r>
+                      <a:rPr lang="pt-BR" sz="2400" i="1" dirty="0" smtClean="0">
+                        <a:latin typeface="Cambria Math" panose="02040503050406030204" pitchFamily="18" charset="0"/>
+                      </a:rPr>
+                      <m:t>, …, </m:t>
+                    </m:r>
+                    <m:sSub>
+                      <m:sSubPr>
+                        <m:ctrlPr>
+                          <a:rPr lang="pt-BR" sz="2400" b="0" i="1" dirty="0" smtClean="0">
+                            <a:latin typeface="Cambria Math" panose="02040503050406030204" pitchFamily="18" charset="0"/>
+                          </a:rPr>
+                        </m:ctrlPr>
+                      </m:sSubPr>
+                      <m:e>
+                        <m:r>
+                          <a:rPr lang="pt-BR" sz="2400" i="1" dirty="0" err="1" smtClean="0">
+                            <a:latin typeface="Cambria Math" panose="02040503050406030204" pitchFamily="18" charset="0"/>
+                          </a:rPr>
+                          <m:t>𝑥</m:t>
+                        </m:r>
+                      </m:e>
+                      <m:sub>
+                        <m:r>
+                          <a:rPr lang="pt-BR" sz="2400" i="1" dirty="0" err="1" smtClean="0">
+                            <a:latin typeface="Cambria Math" panose="02040503050406030204" pitchFamily="18" charset="0"/>
+                          </a:rPr>
+                          <m:t>𝑘</m:t>
+                        </m:r>
+                      </m:sub>
+                    </m:sSub>
+                  </m:oMath>
+                </a14:m>
+                <a:r>
+                  <a:rPr lang="pt-BR" sz="2400" dirty="0"/>
+                  <a:t>, tem distribuição uniforme se, e somente se, </a:t>
+                </a:r>
+              </a:p>
+              <a:p>
+                <a:pPr>
+                  <a:lnSpc>
+                    <a:spcPct val="150000"/>
+                  </a:lnSpc>
+                </a:pPr>
+                <a14:m>
+                  <m:oMathPara xmlns:m="http://schemas.openxmlformats.org/officeDocument/2006/math">
+                    <m:oMathParaPr>
+                      <m:jc m:val="centerGroup"/>
+                    </m:oMathParaPr>
+                    <m:oMath xmlns:m="http://schemas.openxmlformats.org/officeDocument/2006/math">
+                      <m:r>
+                        <a:rPr lang="pt-BR" sz="2400" i="1" dirty="0" smtClean="0">
+                          <a:latin typeface="Cambria Math" panose="02040503050406030204" pitchFamily="18" charset="0"/>
+                        </a:rPr>
+                        <m:t>𝑃</m:t>
+                      </m:r>
+                      <m:d>
+                        <m:dPr>
+                          <m:ctrlPr>
+                            <a:rPr lang="pt-BR" sz="2400" i="1" dirty="0" smtClean="0">
+                              <a:latin typeface="Cambria Math" panose="02040503050406030204" pitchFamily="18" charset="0"/>
+                            </a:rPr>
+                          </m:ctrlPr>
+                        </m:dPr>
+                        <m:e>
+                          <m:r>
+                            <a:rPr lang="pt-BR" sz="2400" i="1" dirty="0" smtClean="0">
+                              <a:latin typeface="Cambria Math" panose="02040503050406030204" pitchFamily="18" charset="0"/>
+                            </a:rPr>
+                            <m:t>𝑋</m:t>
+                          </m:r>
+                          <m:r>
+                            <a:rPr lang="pt-BR" sz="2400" i="1" dirty="0" smtClean="0">
+                              <a:latin typeface="Cambria Math" panose="02040503050406030204" pitchFamily="18" charset="0"/>
+                            </a:rPr>
+                            <m:t> = </m:t>
+                          </m:r>
+                          <m:sSub>
+                            <m:sSubPr>
+                              <m:ctrlPr>
+                                <a:rPr lang="pt-BR" sz="2400" b="0" i="1" dirty="0" smtClean="0">
+                                  <a:latin typeface="Cambria Math" panose="02040503050406030204" pitchFamily="18" charset="0"/>
+                                </a:rPr>
+                              </m:ctrlPr>
+                            </m:sSubPr>
+                            <m:e>
+                              <m:r>
+                                <a:rPr lang="pt-BR" sz="2400" i="1" dirty="0" smtClean="0">
+                                  <a:latin typeface="Cambria Math" panose="02040503050406030204" pitchFamily="18" charset="0"/>
+                                </a:rPr>
+                                <m:t>𝑥</m:t>
+                              </m:r>
+                            </m:e>
+                            <m:sub>
+                              <m:r>
+                                <a:rPr lang="pt-BR" sz="2400" b="0" i="1" dirty="0" smtClean="0">
+                                  <a:latin typeface="Cambria Math" panose="02040503050406030204" pitchFamily="18" charset="0"/>
+                                </a:rPr>
+                                <m:t>𝑖</m:t>
+                              </m:r>
+                            </m:sub>
+                          </m:sSub>
+                        </m:e>
+                      </m:d>
+                      <m:r>
+                        <a:rPr lang="pt-BR" sz="2400" i="1" dirty="0" smtClean="0">
+                          <a:latin typeface="Cambria Math" panose="02040503050406030204" pitchFamily="18" charset="0"/>
+                        </a:rPr>
+                        <m:t>= </m:t>
+                      </m:r>
+                      <m:r>
+                        <a:rPr lang="pt-BR" sz="2400" i="1" dirty="0" smtClean="0">
+                          <a:latin typeface="Cambria Math" panose="02040503050406030204" pitchFamily="18" charset="0"/>
+                        </a:rPr>
+                        <m:t>𝑝</m:t>
+                      </m:r>
+                      <m:d>
+                        <m:dPr>
+                          <m:ctrlPr>
+                            <a:rPr lang="pt-BR" sz="2400" i="1" dirty="0" smtClean="0">
+                              <a:latin typeface="Cambria Math" panose="02040503050406030204" pitchFamily="18" charset="0"/>
+                            </a:rPr>
+                          </m:ctrlPr>
+                        </m:dPr>
+                        <m:e>
+                          <m:sSub>
+                            <m:sSubPr>
+                              <m:ctrlPr>
+                                <a:rPr lang="pt-BR" sz="2400" b="0" i="1" dirty="0" smtClean="0">
+                                  <a:latin typeface="Cambria Math" panose="02040503050406030204" pitchFamily="18" charset="0"/>
+                                </a:rPr>
+                              </m:ctrlPr>
+                            </m:sSubPr>
+                            <m:e>
+                              <m:r>
+                                <a:rPr lang="pt-BR" sz="2400" i="1" dirty="0" smtClean="0">
+                                  <a:latin typeface="Cambria Math" panose="02040503050406030204" pitchFamily="18" charset="0"/>
+                                </a:rPr>
+                                <m:t>𝑥</m:t>
+                              </m:r>
+                            </m:e>
+                            <m:sub>
+                              <m:r>
+                                <a:rPr lang="pt-BR" sz="2400" i="1" dirty="0" smtClean="0">
+                                  <a:latin typeface="Cambria Math" panose="02040503050406030204" pitchFamily="18" charset="0"/>
+                                </a:rPr>
+                                <m:t>𝑖</m:t>
+                              </m:r>
+                            </m:sub>
+                          </m:sSub>
+                        </m:e>
+                      </m:d>
+                      <m:r>
+                        <a:rPr lang="pt-BR" sz="2400" i="1" dirty="0" smtClean="0">
+                          <a:latin typeface="Cambria Math" panose="02040503050406030204" pitchFamily="18" charset="0"/>
+                        </a:rPr>
+                        <m:t>= </m:t>
+                      </m:r>
+                      <m:r>
+                        <a:rPr lang="pt-BR" sz="2400" i="1" dirty="0" smtClean="0">
+                          <a:latin typeface="Cambria Math" panose="02040503050406030204" pitchFamily="18" charset="0"/>
+                        </a:rPr>
+                        <m:t>𝑝</m:t>
+                      </m:r>
+                      <m:r>
+                        <a:rPr lang="pt-BR" sz="2400" i="1" dirty="0" smtClean="0">
+                          <a:latin typeface="Cambria Math" panose="02040503050406030204" pitchFamily="18" charset="0"/>
+                        </a:rPr>
+                        <m:t> = 1/</m:t>
+                      </m:r>
+                      <m:r>
+                        <a:rPr lang="pt-BR" sz="2400" b="0" i="1" dirty="0" smtClean="0">
+                          <a:latin typeface="Cambria Math" panose="02040503050406030204" pitchFamily="18" charset="0"/>
+                        </a:rPr>
+                        <m:t>𝑘</m:t>
+                      </m:r>
+                      <m:r>
+                        <a:rPr lang="pt-BR" sz="2400" i="1" dirty="0" smtClean="0">
+                          <a:latin typeface="Cambria Math" panose="02040503050406030204" pitchFamily="18" charset="0"/>
+                        </a:rPr>
+                        <m:t>,</m:t>
+                      </m:r>
+                    </m:oMath>
+                  </m:oMathPara>
+                </a14:m>
+                <a:endParaRPr lang="pt-BR" sz="2400" dirty="0"/>
+              </a:p>
+              <a:p>
+                <a:pPr>
+                  <a:lnSpc>
+                    <a:spcPct val="150000"/>
+                  </a:lnSpc>
+                </a:pPr>
+                <a:endParaRPr lang="pt-BR" sz="2400" dirty="0"/>
+              </a:p>
+              <a:p>
+                <a:pPr>
+                  <a:lnSpc>
+                    <a:spcPct val="150000"/>
+                  </a:lnSpc>
+                </a:pPr>
+                <a:r>
+                  <a:rPr lang="pt-BR" sz="2400" dirty="0"/>
+                  <a:t>para todo </a:t>
+                </a:r>
+                <a14:m>
+                  <m:oMath xmlns:m="http://schemas.openxmlformats.org/officeDocument/2006/math">
+                    <m:r>
+                      <a:rPr lang="pt-BR" sz="2400" i="1" dirty="0" smtClean="0">
+                        <a:latin typeface="Cambria Math" panose="02040503050406030204" pitchFamily="18" charset="0"/>
+                      </a:rPr>
+                      <m:t>𝑖</m:t>
+                    </m:r>
+                    <m:r>
+                      <a:rPr lang="pt-BR" sz="2400" i="1" dirty="0" smtClean="0">
+                        <a:latin typeface="Cambria Math" panose="02040503050406030204" pitchFamily="18" charset="0"/>
+                      </a:rPr>
+                      <m:t> = 1, 2, …, </m:t>
+                    </m:r>
+                    <m:r>
+                      <a:rPr lang="pt-BR" sz="2400" i="1" dirty="0" smtClean="0">
+                        <a:latin typeface="Cambria Math" panose="02040503050406030204" pitchFamily="18" charset="0"/>
+                      </a:rPr>
+                      <m:t>𝑘</m:t>
+                    </m:r>
+                    <m:r>
+                      <a:rPr lang="pt-BR" sz="2400" i="1" dirty="0" smtClean="0">
+                        <a:latin typeface="Cambria Math" panose="02040503050406030204" pitchFamily="18" charset="0"/>
+                      </a:rPr>
+                      <m:t>.</m:t>
+                    </m:r>
+                  </m:oMath>
+                </a14:m>
+                <a:endParaRPr lang="pt-BR" sz="2400" dirty="0"/>
+              </a:p>
+              <a:p>
+                <a:pPr>
+                  <a:lnSpc>
+                    <a:spcPct val="150000"/>
+                  </a:lnSpc>
+                </a:pPr>
+                <a:endParaRPr lang="pt-BR" sz="2400" b="1" dirty="0"/>
+              </a:p>
+              <a:p>
+                <a:pPr>
+                  <a:lnSpc>
+                    <a:spcPct val="150000"/>
+                  </a:lnSpc>
+                </a:pPr>
+                <a:r>
+                  <a:rPr lang="pt-BR" sz="2400" b="1" dirty="0"/>
+                  <a:t>Notação: </a:t>
+                </a:r>
+                <a14:m>
+                  <m:oMath xmlns:m="http://schemas.openxmlformats.org/officeDocument/2006/math">
+                    <m:r>
+                      <m:rPr>
+                        <m:sty m:val="p"/>
+                      </m:rPr>
+                      <a:rPr lang="pt-BR" sz="2400" b="0" i="0" smtClean="0">
+                        <a:latin typeface="Cambria Math" panose="02040503050406030204" pitchFamily="18" charset="0"/>
+                      </a:rPr>
+                      <m:t>X</m:t>
+                    </m:r>
+                    <m:r>
+                      <a:rPr lang="pt-BR" sz="2400" b="0" i="1" smtClean="0">
+                        <a:latin typeface="Cambria Math" panose="02040503050406030204" pitchFamily="18" charset="0"/>
+                      </a:rPr>
+                      <m:t>~</m:t>
+                    </m:r>
+                    <m:sSub>
+                      <m:sSubPr>
+                        <m:ctrlPr>
+                          <a:rPr lang="pt-BR" sz="2400" b="0" i="1" smtClean="0">
+                            <a:latin typeface="Cambria Math" panose="02040503050406030204" pitchFamily="18" charset="0"/>
+                          </a:rPr>
+                        </m:ctrlPr>
+                      </m:sSubPr>
+                      <m:e>
+                        <m:r>
+                          <a:rPr lang="pt-BR" sz="2400" b="0" i="1" smtClean="0">
+                            <a:latin typeface="Cambria Math" panose="02040503050406030204" pitchFamily="18" charset="0"/>
+                          </a:rPr>
+                          <m:t>𝑈</m:t>
+                        </m:r>
+                      </m:e>
+                      <m:sub>
+                        <m:r>
+                          <a:rPr lang="pt-BR" sz="2400" b="0" i="1" smtClean="0">
+                            <a:latin typeface="Cambria Math" panose="02040503050406030204" pitchFamily="18" charset="0"/>
+                          </a:rPr>
+                          <m:t>𝐷</m:t>
+                        </m:r>
+                      </m:sub>
+                    </m:sSub>
+                    <m:r>
+                      <a:rPr lang="pt-BR" sz="2400" b="0" i="1" smtClean="0">
+                        <a:latin typeface="Cambria Math" panose="02040503050406030204" pitchFamily="18" charset="0"/>
+                      </a:rPr>
+                      <m:t>[1,</m:t>
+                    </m:r>
+                    <m:r>
+                      <a:rPr lang="pt-BR" sz="2400" b="0" i="1" smtClean="0">
+                        <a:latin typeface="Cambria Math" panose="02040503050406030204" pitchFamily="18" charset="0"/>
+                      </a:rPr>
+                      <m:t>𝑘</m:t>
+                    </m:r>
+                    <m:r>
+                      <a:rPr lang="pt-BR" sz="2400" b="0" i="1" smtClean="0">
+                        <a:latin typeface="Cambria Math" panose="02040503050406030204" pitchFamily="18" charset="0"/>
+                      </a:rPr>
+                      <m:t>]</m:t>
+                    </m:r>
+                  </m:oMath>
+                </a14:m>
+                <a:r>
+                  <a:rPr lang="pt-BR" sz="2400" dirty="0"/>
+                  <a:t> (valores de 1 a k.)</a:t>
+                </a:r>
+              </a:p>
+            </p:txBody>
+          </p:sp>
+        </mc:Choice>
+        <mc:Fallback xmlns="">
+          <p:sp>
+            <p:nvSpPr>
+              <p:cNvPr id="6" name="CaixaDeTexto 5">
+                <a:extLst>
+                  <a:ext uri="{FF2B5EF4-FFF2-40B4-BE49-F238E27FC236}">
+                    <a16:creationId xmlns:a16="http://schemas.microsoft.com/office/drawing/2014/main" id="{720B10DA-C761-4DEE-8D86-E170E1C2E981}"/>
+                  </a:ext>
+                </a:extLst>
+              </p:cNvPr>
+              <p:cNvSpPr txBox="1">
+                <a:spLocks noRot="1" noChangeAspect="1" noMove="1" noResize="1" noEditPoints="1" noAdjustHandles="1" noChangeArrowheads="1" noChangeShapeType="1" noTextEdit="1"/>
+              </p:cNvSpPr>
+              <p:nvPr/>
+            </p:nvSpPr>
+            <p:spPr>
+              <a:xfrm>
+                <a:off x="794601" y="713754"/>
+                <a:ext cx="10067277" cy="5574090"/>
+              </a:xfrm>
+              <a:prstGeom prst="rect">
+                <a:avLst/>
+              </a:prstGeom>
+              <a:blipFill>
+                <a:blip r:embed="rId2"/>
+                <a:stretch>
+                  <a:fillRect l="-908" b="-1641"/>
+                </a:stretch>
+              </a:blipFill>
+            </p:spPr>
+            <p:txBody>
+              <a:bodyPr/>
+              <a:lstStyle/>
+              <a:p>
+                <a:r>
+                  <a:rPr lang="pt-BR">
+                    <a:noFill/>
+                  </a:rPr>
+                  <a:t> </a:t>
+                </a:r>
+              </a:p>
+            </p:txBody>
+          </p:sp>
+        </mc:Fallback>
+      </mc:AlternateContent>
+      <p:sp>
+        <p:nvSpPr>
+          <p:cNvPr id="3" name="CaixaDeTexto 2">
+            <a:extLst>
+              <a:ext uri="{FF2B5EF4-FFF2-40B4-BE49-F238E27FC236}">
+                <a16:creationId xmlns:a16="http://schemas.microsoft.com/office/drawing/2014/main" id="{19131A04-B5D6-4211-8B49-4615DE5797E9}"/>
+              </a:ext>
+            </a:extLst>
+          </p:cNvPr>
+          <p:cNvSpPr txBox="1"/>
+          <p:nvPr/>
+        </p:nvSpPr>
+        <p:spPr>
+          <a:xfrm>
+            <a:off x="361395" y="6488668"/>
+            <a:ext cx="7620000" cy="300210"/>
+          </a:xfrm>
+          <a:prstGeom prst="rect">
+            <a:avLst/>
+          </a:prstGeom>
+          <a:noFill/>
+        </p:spPr>
+        <p:txBody>
+          <a:bodyPr wrap="none" rtlCol="0">
+            <a:spAutoFit/>
+          </a:bodyPr>
+          <a:lstStyle/>
+          <a:p>
+            <a:r>
+              <a:rPr lang="pt-BR" sz="1351" dirty="0"/>
+              <a:t>CEA055 - Estatística e Probabilidade - Professor: Marcos Goulart Lima</a:t>
+            </a:r>
+          </a:p>
+        </p:txBody>
+      </p:sp>
+    </p:spTree>
+    <p:extLst>
+      <p:ext uri="{BB962C8B-B14F-4D97-AF65-F5344CB8AC3E}">
+        <p14:creationId xmlns:p14="http://schemas.microsoft.com/office/powerpoint/2010/main" val="2405478703"/>
+      </p:ext>
+    </p:extLst>
+  </p:cSld>
+  <p:clrMapOvr>
+    <a:masterClrMapping/>
+  </p:clrMapOvr>
+</p:sld>
+</file>
+
+<file path=ppt/slides/slide20.xml><?xml version="1.0" encoding="utf-8"?>
 <p:sld xmlns:a="http://schemas.openxmlformats.org/drawingml/2006/main" xmlns:r="http://schemas.openxmlformats.org/officeDocument/2006/relationships" xmlns:p="http://schemas.openxmlformats.org/presentationml/2006/main">
   <p:cSld>
     <p:spTree>
@@ -10648,231 +9332,7 @@
 </p:sld>
 </file>
 
-<file path=ppt/slides/slide24.xml><?xml version="1.0" encoding="utf-8"?>
-<p:sld xmlns:a="http://schemas.openxmlformats.org/drawingml/2006/main" xmlns:r="http://schemas.openxmlformats.org/officeDocument/2006/relationships" xmlns:p="http://schemas.openxmlformats.org/presentationml/2006/main">
-  <p:cSld>
-    <p:bg>
-      <p:bgPr>
-        <a:solidFill>
-          <a:srgbClr val="E6CCCC"/>
-        </a:solidFill>
-        <a:effectLst/>
-      </p:bgPr>
-    </p:bg>
-    <p:spTree>
-      <p:nvGrpSpPr>
-        <p:cNvPr id="1" name=""/>
-        <p:cNvGrpSpPr/>
-        <p:nvPr/>
-      </p:nvGrpSpPr>
-      <p:grpSpPr>
-        <a:xfrm>
-          <a:off x="0" y="0"/>
-          <a:ext cx="0" cy="0"/>
-          <a:chOff x="0" y="0"/>
-          <a:chExt cx="0" cy="0"/>
-        </a:xfrm>
-      </p:grpSpPr>
-      <p:sp>
-        <p:nvSpPr>
-          <p:cNvPr id="2" name="Oval 1"/>
-          <p:cNvSpPr/>
-          <p:nvPr/>
-        </p:nvSpPr>
-        <p:spPr>
-          <a:xfrm>
-            <a:off x="5775960" y="457200"/>
-            <a:ext cx="640080" cy="640080"/>
-          </a:xfrm>
-          <a:prstGeom prst="ellipse">
-            <a:avLst/>
-          </a:prstGeom>
-          <a:solidFill>
-            <a:srgbClr val="8A3B3F"/>
-          </a:solidFill>
-          <a:ln>
-            <a:noFill/>
-          </a:ln>
-        </p:spPr>
-        <p:style>
-          <a:lnRef idx="1">
-            <a:schemeClr val="accent1"/>
-          </a:lnRef>
-          <a:fillRef idx="3">
-            <a:schemeClr val="accent1"/>
-          </a:fillRef>
-          <a:effectRef idx="2">
-            <a:schemeClr val="accent1"/>
-          </a:effectRef>
-          <a:fontRef idx="minor">
-            <a:schemeClr val="lt1"/>
-          </a:fontRef>
-        </p:style>
-        <p:txBody>
-          <a:bodyPr wrap="none" rtlCol="0" anchor="ctr"/>
-          <a:lstStyle/>
-          <a:p>
-            <a:pPr algn="ctr"/>
-            <a:r>
-              <a:rPr sz="2800" b="1">
-                <a:solidFill>
-                  <a:srgbClr val="FFFFFF"/>
-                </a:solidFill>
-              </a:rPr>
-              <a:t>!</a:t>
-            </a:r>
-          </a:p>
-        </p:txBody>
-      </p:sp>
-      <p:sp>
-        <p:nvSpPr>
-          <p:cNvPr id="3" name="TextBox 2"/>
-          <p:cNvSpPr txBox="1"/>
-          <p:nvPr/>
-        </p:nvSpPr>
-        <p:spPr>
-          <a:xfrm>
-            <a:off x="914400" y="1371600"/>
-            <a:ext cx="10363200" cy="457200"/>
-          </a:xfrm>
-          <a:prstGeom prst="rect">
-            <a:avLst/>
-          </a:prstGeom>
-          <a:noFill/>
-        </p:spPr>
-        <p:txBody>
-          <a:bodyPr wrap="none">
-            <a:spAutoFit/>
-          </a:bodyPr>
-          <a:lstStyle/>
-          <a:p>
-            <a:pPr algn="ctr"/>
-            <a:r>
-              <a:rPr sz="1800" b="1">
-                <a:solidFill>
-                  <a:srgbClr val="8A3B3F"/>
-                </a:solidFill>
-              </a:rPr>
-              <a:t>VERIFICAÇÃO RÁPIDA</a:t>
-            </a:r>
-          </a:p>
-        </p:txBody>
-      </p:sp>
-      <p:sp>
-        <p:nvSpPr>
-          <p:cNvPr id="4" name="TextBox 3"/>
-          <p:cNvSpPr txBox="1"/>
-          <p:nvPr/>
-        </p:nvSpPr>
-        <p:spPr>
-          <a:xfrm>
-            <a:off x="1188720" y="2103120"/>
-            <a:ext cx="9814560" cy="1600000"/>
-          </a:xfrm>
-          <a:prstGeom prst="rect">
-            <a:avLst/>
-          </a:prstGeom>
-          <a:noFill/>
-        </p:spPr>
-        <p:txBody>
-          <a:bodyPr wrap="square">
-            <a:spAutoFit/>
-          </a:bodyPr>
-          <a:lstStyle/>
-          <a:p>
-            <a:pPr algn="ctr">
-              <a:lnSpc>
-                <a:spcPct val="150000"/>
-              </a:lnSpc>
-            </a:pPr>
-            <a:r>
-              <a:rPr sz="2800" b="1">
-                <a:solidFill>
-                  <a:srgbClr val="3D1F21"/>
-                </a:solidFill>
-              </a:rPr>
-              <a:t>"Por que, se r=1, a fórmula de Pascal vira exatamente a fórmula da geométrica?"</a:t>
-            </a:r>
-          </a:p>
-        </p:txBody>
-      </p:sp>
-      <p:sp>
-        <p:nvSpPr>
-          <p:cNvPr id="5" name="TextBox 4"/>
-          <p:cNvSpPr txBox="1"/>
-          <p:nvPr/>
-        </p:nvSpPr>
-        <p:spPr>
-          <a:xfrm>
-            <a:off x="914400" y="5577840"/>
-            <a:ext cx="10363200" cy="457200"/>
-          </a:xfrm>
-          <a:prstGeom prst="rect">
-            <a:avLst/>
-          </a:prstGeom>
-          <a:noFill/>
-        </p:spPr>
-        <p:txBody>
-          <a:bodyPr wrap="none">
-            <a:spAutoFit/>
-          </a:bodyPr>
-          <a:lstStyle/>
-          <a:p>
-            <a:pPr algn="ctr"/>
-            <a:r>
-              <a:rPr sz="1600" i="1">
-                <a:solidFill>
-                  <a:srgbClr val="8A5C5E"/>
-                </a:solidFill>
-              </a:rPr>
-              <a:t>Sorteie um aluno antes de continuar</a:t>
-            </a:r>
-          </a:p>
-        </p:txBody>
-      </p:sp>
-      <p:sp>
-        <p:nvSpPr>
-          <p:cNvPr id="6" name="TextBox 5"/>
-          <p:cNvSpPr txBox="1"/>
-          <p:nvPr/>
-        </p:nvSpPr>
-        <p:spPr>
-          <a:xfrm>
-            <a:off x="361188" y="6463893"/>
-            <a:ext cx="7772400" cy="308152"/>
-          </a:xfrm>
-          <a:prstGeom prst="rect">
-            <a:avLst/>
-          </a:prstGeom>
-          <a:noFill/>
-        </p:spPr>
-        <p:txBody>
-          <a:bodyPr wrap="none">
-            <a:spAutoFit/>
-          </a:bodyPr>
-          <a:lstStyle/>
-          <a:p>
-            <a:pPr algn="l"/>
-            <a:r>
-              <a:rPr sz="1400">
-                <a:solidFill>
-                  <a:srgbClr val="595959"/>
-                </a:solidFill>
-              </a:rPr>
-              <a:t>CEA055 - Estatística e Probabilidade - Professor: Marcos Goulart Lima</a:t>
-            </a:r>
-          </a:p>
-        </p:txBody>
-      </p:sp>
-    </p:spTree>
-  </p:cSld>
-  <p:clrMapOvr>
-    <a:masterClrMapping/>
-  </p:clrMapOvr>
-</p:sld>
-</file>
-
-<file path=ppt/slides/slide25.xml><?xml version="1.0" encoding="utf-8"?>
+<file path=ppt/slides/slide21.xml><?xml version="1.0" encoding="utf-8"?>
 <p:sld xmlns:a="http://schemas.openxmlformats.org/drawingml/2006/main" xmlns:r="http://schemas.openxmlformats.org/officeDocument/2006/relationships" xmlns:p="http://schemas.openxmlformats.org/presentationml/2006/main">
   <p:cSld>
     <p:spTree>
@@ -11040,7 +9500,7 @@
 </p:sld>
 </file>
 
-<file path=ppt/slides/slide26.xml><?xml version="1.0" encoding="utf-8"?>
+<file path=ppt/slides/slide22.xml><?xml version="1.0" encoding="utf-8"?>
 <p:sld xmlns:a="http://schemas.openxmlformats.org/drawingml/2006/main" xmlns:r="http://schemas.openxmlformats.org/officeDocument/2006/relationships" xmlns:p="http://schemas.openxmlformats.org/presentationml/2006/main">
   <p:cSld>
     <p:spTree>
@@ -13807,230 +12267,6 @@
 <file path=ppt/slides/slide6.xml><?xml version="1.0" encoding="utf-8"?>
 <p:sld xmlns:a="http://schemas.openxmlformats.org/drawingml/2006/main" xmlns:r="http://schemas.openxmlformats.org/officeDocument/2006/relationships" xmlns:p="http://schemas.openxmlformats.org/presentationml/2006/main">
   <p:cSld>
-    <p:bg>
-      <p:bgPr>
-        <a:solidFill>
-          <a:srgbClr val="E6CCCC"/>
-        </a:solidFill>
-        <a:effectLst/>
-      </p:bgPr>
-    </p:bg>
-    <p:spTree>
-      <p:nvGrpSpPr>
-        <p:cNvPr id="1" name=""/>
-        <p:cNvGrpSpPr/>
-        <p:nvPr/>
-      </p:nvGrpSpPr>
-      <p:grpSpPr>
-        <a:xfrm>
-          <a:off x="0" y="0"/>
-          <a:ext cx="0" cy="0"/>
-          <a:chOff x="0" y="0"/>
-          <a:chExt cx="0" cy="0"/>
-        </a:xfrm>
-      </p:grpSpPr>
-      <p:sp>
-        <p:nvSpPr>
-          <p:cNvPr id="2" name="Oval 1"/>
-          <p:cNvSpPr/>
-          <p:nvPr/>
-        </p:nvSpPr>
-        <p:spPr>
-          <a:xfrm>
-            <a:off x="5775960" y="457200"/>
-            <a:ext cx="640080" cy="640080"/>
-          </a:xfrm>
-          <a:prstGeom prst="ellipse">
-            <a:avLst/>
-          </a:prstGeom>
-          <a:solidFill>
-            <a:srgbClr val="8A3B3F"/>
-          </a:solidFill>
-          <a:ln>
-            <a:noFill/>
-          </a:ln>
-        </p:spPr>
-        <p:style>
-          <a:lnRef idx="1">
-            <a:schemeClr val="accent1"/>
-          </a:lnRef>
-          <a:fillRef idx="3">
-            <a:schemeClr val="accent1"/>
-          </a:fillRef>
-          <a:effectRef idx="2">
-            <a:schemeClr val="accent1"/>
-          </a:effectRef>
-          <a:fontRef idx="minor">
-            <a:schemeClr val="lt1"/>
-          </a:fontRef>
-        </p:style>
-        <p:txBody>
-          <a:bodyPr wrap="none" rtlCol="0" anchor="ctr"/>
-          <a:lstStyle/>
-          <a:p>
-            <a:pPr algn="ctr"/>
-            <a:r>
-              <a:rPr sz="2800" b="1">
-                <a:solidFill>
-                  <a:srgbClr val="FFFFFF"/>
-                </a:solidFill>
-              </a:rPr>
-              <a:t>!</a:t>
-            </a:r>
-          </a:p>
-        </p:txBody>
-      </p:sp>
-      <p:sp>
-        <p:nvSpPr>
-          <p:cNvPr id="3" name="TextBox 2"/>
-          <p:cNvSpPr txBox="1"/>
-          <p:nvPr/>
-        </p:nvSpPr>
-        <p:spPr>
-          <a:xfrm>
-            <a:off x="914400" y="1371600"/>
-            <a:ext cx="10363200" cy="457200"/>
-          </a:xfrm>
-          <a:prstGeom prst="rect">
-            <a:avLst/>
-          </a:prstGeom>
-          <a:noFill/>
-        </p:spPr>
-        <p:txBody>
-          <a:bodyPr wrap="none">
-            <a:spAutoFit/>
-          </a:bodyPr>
-          <a:lstStyle/>
-          <a:p>
-            <a:pPr algn="ctr"/>
-            <a:r>
-              <a:rPr sz="1800" b="1">
-                <a:solidFill>
-                  <a:srgbClr val="8A3B3F"/>
-                </a:solidFill>
-              </a:rPr>
-              <a:t>VERIFICAÇÃO RÁPIDA</a:t>
-            </a:r>
-          </a:p>
-        </p:txBody>
-      </p:sp>
-      <p:sp>
-        <p:nvSpPr>
-          <p:cNvPr id="4" name="TextBox 3"/>
-          <p:cNvSpPr txBox="1"/>
-          <p:nvPr/>
-        </p:nvSpPr>
-        <p:spPr>
-          <a:xfrm>
-            <a:off x="1188720" y="2103120"/>
-            <a:ext cx="9814560" cy="2200000"/>
-          </a:xfrm>
-          <a:prstGeom prst="rect">
-            <a:avLst/>
-          </a:prstGeom>
-          <a:noFill/>
-        </p:spPr>
-        <p:txBody>
-          <a:bodyPr wrap="square">
-            <a:spAutoFit/>
-          </a:bodyPr>
-          <a:lstStyle/>
-          <a:p>
-            <a:pPr algn="ctr">
-              <a:lnSpc>
-                <a:spcPct val="150000"/>
-              </a:lnSpc>
-            </a:pPr>
-            <a:r>
-              <a:rPr sz="2600" b="1">
-                <a:solidFill>
-                  <a:srgbClr val="3D1F21"/>
-                </a:solidFill>
-              </a:rPr>
-              <a:t>"Se o d8 fosse viciado — cada face com uma probabilidade diferente — ainda poderíamos usar as fórmulas E(X)=(n+1)/2 e Var(X)=(n²-1)/12?"</a:t>
-            </a:r>
-          </a:p>
-        </p:txBody>
-      </p:sp>
-      <p:sp>
-        <p:nvSpPr>
-          <p:cNvPr id="5" name="TextBox 4"/>
-          <p:cNvSpPr txBox="1"/>
-          <p:nvPr/>
-        </p:nvSpPr>
-        <p:spPr>
-          <a:xfrm>
-            <a:off x="914400" y="5577840"/>
-            <a:ext cx="10363200" cy="457200"/>
-          </a:xfrm>
-          <a:prstGeom prst="rect">
-            <a:avLst/>
-          </a:prstGeom>
-          <a:noFill/>
-        </p:spPr>
-        <p:txBody>
-          <a:bodyPr wrap="none">
-            <a:spAutoFit/>
-          </a:bodyPr>
-          <a:lstStyle/>
-          <a:p>
-            <a:pPr algn="ctr"/>
-            <a:r>
-              <a:rPr sz="1600" i="1">
-                <a:solidFill>
-                  <a:srgbClr val="8A5C5E"/>
-                </a:solidFill>
-              </a:rPr>
-              <a:t>Sorteie um aluno antes de continuar</a:t>
-            </a:r>
-          </a:p>
-        </p:txBody>
-      </p:sp>
-      <p:sp>
-        <p:nvSpPr>
-          <p:cNvPr id="6" name="TextBox 5"/>
-          <p:cNvSpPr txBox="1"/>
-          <p:nvPr/>
-        </p:nvSpPr>
-        <p:spPr>
-          <a:xfrm>
-            <a:off x="361188" y="6463893"/>
-            <a:ext cx="7772400" cy="308152"/>
-          </a:xfrm>
-          <a:prstGeom prst="rect">
-            <a:avLst/>
-          </a:prstGeom>
-          <a:noFill/>
-        </p:spPr>
-        <p:txBody>
-          <a:bodyPr wrap="none">
-            <a:spAutoFit/>
-          </a:bodyPr>
-          <a:lstStyle/>
-          <a:p>
-            <a:pPr algn="l"/>
-            <a:r>
-              <a:rPr sz="1400">
-                <a:solidFill>
-                  <a:srgbClr val="595959"/>
-                </a:solidFill>
-              </a:rPr>
-              <a:t>CEA055 - Estatística e Probabilidade - Professor: Marcos Goulart Lima</a:t>
-            </a:r>
-          </a:p>
-        </p:txBody>
-      </p:sp>
-    </p:spTree>
-  </p:cSld>
-  <p:clrMapOvr>
-    <a:masterClrMapping/>
-  </p:clrMapOvr>
-</p:sld>
-</file>
-
-<file path=ppt/slides/slide7.xml><?xml version="1.0" encoding="utf-8"?>
-<p:sld xmlns:a="http://schemas.openxmlformats.org/drawingml/2006/main" xmlns:r="http://schemas.openxmlformats.org/officeDocument/2006/relationships" xmlns:p="http://schemas.openxmlformats.org/presentationml/2006/main">
-  <p:cSld>
     <p:spTree>
       <p:nvGrpSpPr>
         <p:cNvPr id="1" name=""/>
@@ -14416,7 +12652,7 @@
 </p:sld>
 </file>
 
-<file path=ppt/slides/slide8.xml><?xml version="1.0" encoding="utf-8"?>
+<file path=ppt/slides/slide7.xml><?xml version="1.0" encoding="utf-8"?>
 <p:sld xmlns:a="http://schemas.openxmlformats.org/drawingml/2006/main" xmlns:r="http://schemas.openxmlformats.org/officeDocument/2006/relationships" xmlns:p="http://schemas.openxmlformats.org/presentationml/2006/main">
   <p:cSld>
     <p:spTree>
@@ -14433,8 +12669,8 @@
           <a:chExt cx="0" cy="0"/>
         </a:xfrm>
       </p:grpSpPr>
-      <mc:AlternateContent xmlns:mc="http://schemas.openxmlformats.org/markup-compatibility/2006">
-        <mc:Choice xmlns:a14="http://schemas.microsoft.com/office/drawing/2010/main" Requires="a14">
+      <mc:AlternateContent xmlns:mc="http://schemas.openxmlformats.org/markup-compatibility/2006" xmlns:a14="http://schemas.microsoft.com/office/drawing/2010/main">
+        <mc:Choice Requires="a14">
           <p:sp>
             <p:nvSpPr>
               <p:cNvPr id="6" name="CaixaDeTexto 5">
@@ -14994,13 +13230,7 @@
                               <a:rPr lang="pt-BR" sz="2400" b="0" i="1" smtClean="0">
                                 <a:latin typeface="Cambria Math" panose="02040503050406030204" pitchFamily="18" charset="0"/>
                               </a:rPr>
-                              <m:t>&lt;</m:t>
-                            </m:r>
-                            <m:r>
-                              <a:rPr lang="pt-BR" sz="2400" b="0" i="1" smtClean="0">
-                                <a:latin typeface="Cambria Math" panose="02040503050406030204" pitchFamily="18" charset="0"/>
-                              </a:rPr>
-                              <m:t> 1,</m:t>
+                              <m:t>&lt; 1,</m:t>
                             </m:r>
                           </m:e>
                         </m:mr>
@@ -15028,13 +13258,7 @@
                               <a:rPr lang="pt-BR" sz="2400" b="0" i="1" smtClean="0">
                                 <a:latin typeface="Cambria Math" panose="02040503050406030204" pitchFamily="18" charset="0"/>
                               </a:rPr>
-                              <m:t>≥</m:t>
-                            </m:r>
-                            <m:r>
-                              <a:rPr lang="pt-BR" sz="2400" b="0" i="1" smtClean="0">
-                                <a:latin typeface="Cambria Math" panose="02040503050406030204" pitchFamily="18" charset="0"/>
-                              </a:rPr>
-                              <m:t>1.</m:t>
+                              <m:t>≥1.</m:t>
                             </m:r>
                           </m:e>
                         </m:mr>
@@ -15047,7 +13271,7 @@
             </p:txBody>
           </p:sp>
         </mc:Choice>
-        <mc:Fallback>
+        <mc:Fallback xmlns="">
           <p:sp>
             <p:nvSpPr>
               <p:cNvPr id="6" name="CaixaDeTexto 5">
@@ -15140,7 +13364,7 @@
 </p:sld>
 </file>
 
-<file path=ppt/slides/slide9.xml><?xml version="1.0" encoding="utf-8"?>
+<file path=ppt/slides/slide8.xml><?xml version="1.0" encoding="utf-8"?>
 <p:sld xmlns:a="http://schemas.openxmlformats.org/drawingml/2006/main" xmlns:r="http://schemas.openxmlformats.org/officeDocument/2006/relationships" xmlns:p="http://schemas.openxmlformats.org/presentationml/2006/main">
   <p:cSld>
     <p:spTree>
@@ -15457,6 +13681,882 @@
     <p:extLst>
       <p:ext uri="{BB962C8B-B14F-4D97-AF65-F5344CB8AC3E}">
         <p14:creationId xmlns:p14="http://schemas.microsoft.com/office/powerpoint/2010/main" val="1838826235"/>
+      </p:ext>
+    </p:extLst>
+  </p:cSld>
+  <p:clrMapOvr>
+    <a:masterClrMapping/>
+  </p:clrMapOvr>
+</p:sld>
+</file>
+
+<file path=ppt/slides/slide9.xml><?xml version="1.0" encoding="utf-8"?>
+<p:sld xmlns:a="http://schemas.openxmlformats.org/drawingml/2006/main" xmlns:r="http://schemas.openxmlformats.org/officeDocument/2006/relationships" xmlns:p="http://schemas.openxmlformats.org/presentationml/2006/main">
+  <p:cSld>
+    <p:spTree>
+      <p:nvGrpSpPr>
+        <p:cNvPr id="1" name=""/>
+        <p:cNvGrpSpPr/>
+        <p:nvPr/>
+      </p:nvGrpSpPr>
+      <p:grpSpPr>
+        <a:xfrm>
+          <a:off x="0" y="0"/>
+          <a:ext cx="0" cy="0"/>
+          <a:chOff x="0" y="0"/>
+          <a:chExt cx="0" cy="0"/>
+        </a:xfrm>
+      </p:grpSpPr>
+      <mc:AlternateContent xmlns:mc="http://schemas.openxmlformats.org/markup-compatibility/2006" xmlns:a14="http://schemas.microsoft.com/office/drawing/2010/main">
+        <mc:Choice Requires="a14">
+          <p:sp>
+            <p:nvSpPr>
+              <p:cNvPr id="6" name="CaixaDeTexto 5">
+                <a:extLst>
+                  <a:ext uri="{FF2B5EF4-FFF2-40B4-BE49-F238E27FC236}">
+                    <a16:creationId xmlns:a16="http://schemas.microsoft.com/office/drawing/2014/main" id="{720B10DA-C761-4DEE-8D86-E170E1C2E981}"/>
+                  </a:ext>
+                </a:extLst>
+              </p:cNvPr>
+              <p:cNvSpPr txBox="1"/>
+              <p:nvPr/>
+            </p:nvSpPr>
+            <p:spPr>
+              <a:xfrm>
+                <a:off x="669652" y="649940"/>
+                <a:ext cx="10067277" cy="5678478"/>
+              </a:xfrm>
+              <a:prstGeom prst="rect">
+                <a:avLst/>
+              </a:prstGeom>
+              <a:noFill/>
+            </p:spPr>
+            <p:txBody>
+              <a:bodyPr wrap="square" rtlCol="0">
+                <a:spAutoFit/>
+              </a:bodyPr>
+              <a:lstStyle/>
+              <a:p>
+                <a:pPr marL="342900" indent="-342900">
+                  <a:lnSpc>
+                    <a:spcPct val="150000"/>
+                  </a:lnSpc>
+                  <a:buFont typeface="Arial" panose="020B0604020202020204" pitchFamily="34" charset="0"/>
+                  <a:buChar char="•"/>
+                </a:pPr>
+                <a:r>
+                  <a:rPr lang="pt-BR" sz="2200" b="0" dirty="0"/>
+                  <a:t>Parâmetro </a:t>
+                </a:r>
+                <a14:m>
+                  <m:oMath xmlns:m="http://schemas.openxmlformats.org/officeDocument/2006/math">
+                    <m:r>
+                      <a:rPr lang="pt-BR" sz="2200" b="0" i="1" dirty="0" smtClean="0">
+                        <a:latin typeface="Cambria Math" panose="02040503050406030204" pitchFamily="18" charset="0"/>
+                      </a:rPr>
+                      <m:t>𝑝</m:t>
+                    </m:r>
+                  </m:oMath>
+                </a14:m>
+                <a:r>
+                  <a:rPr lang="pt-BR" sz="2200" b="0" dirty="0"/>
+                  <a:t> (probabilidade de sucesso = sair bola verde):</a:t>
+                </a:r>
+              </a:p>
+              <a:p>
+                <a:pPr>
+                  <a:lnSpc>
+                    <a:spcPct val="150000"/>
+                  </a:lnSpc>
+                </a:pPr>
+                <a14:m>
+                  <m:oMath xmlns:m="http://schemas.openxmlformats.org/officeDocument/2006/math">
+                    <m:r>
+                      <a:rPr lang="pt-BR" sz="2200" b="0" i="1" dirty="0" smtClean="0">
+                        <a:latin typeface="Cambria Math" panose="02040503050406030204" pitchFamily="18" charset="0"/>
+                      </a:rPr>
+                      <m:t>𝑝</m:t>
+                    </m:r>
+                    <m:r>
+                      <a:rPr lang="pt-BR" sz="2200" b="0" i="1" dirty="0" smtClean="0">
+                        <a:latin typeface="Cambria Math" panose="02040503050406030204" pitchFamily="18" charset="0"/>
+                      </a:rPr>
+                      <m:t> = </m:t>
+                    </m:r>
+                    <m:r>
+                      <a:rPr lang="pt-BR" sz="2200" b="0" i="1" dirty="0" smtClean="0">
+                        <a:latin typeface="Cambria Math" panose="02040503050406030204" pitchFamily="18" charset="0"/>
+                      </a:rPr>
+                      <m:t>𝑃</m:t>
+                    </m:r>
+                    <m:r>
+                      <a:rPr lang="pt-BR" sz="2200" b="0" i="1" dirty="0" smtClean="0">
+                        <a:latin typeface="Cambria Math" panose="02040503050406030204" pitchFamily="18" charset="0"/>
+                      </a:rPr>
+                      <m:t>(</m:t>
+                    </m:r>
+                    <m:r>
+                      <a:rPr lang="pt-BR" sz="2200" b="0" i="1" dirty="0" smtClean="0">
+                        <a:latin typeface="Cambria Math" panose="02040503050406030204" pitchFamily="18" charset="0"/>
+                      </a:rPr>
+                      <m:t>𝑋</m:t>
+                    </m:r>
+                    <m:r>
+                      <a:rPr lang="pt-BR" sz="2200" b="0" i="1" dirty="0" smtClean="0">
+                        <a:latin typeface="Cambria Math" panose="02040503050406030204" pitchFamily="18" charset="0"/>
+                      </a:rPr>
+                      <m:t>=1) =</m:t>
+                    </m:r>
+                  </m:oMath>
+                </a14:m>
+                <a:r>
+                  <a:rPr lang="pt-BR" sz="2200" b="0" dirty="0"/>
+                  <a:t> bolas verdes / total de bolas </a:t>
+                </a:r>
+                <a14:m>
+                  <m:oMath xmlns:m="http://schemas.openxmlformats.org/officeDocument/2006/math">
+                    <m:r>
+                      <a:rPr lang="pt-BR" sz="2200" b="0" i="1" dirty="0" smtClean="0">
+                        <a:latin typeface="Cambria Math" panose="02040503050406030204" pitchFamily="18" charset="0"/>
+                      </a:rPr>
+                      <m:t>= 20/50 = 2/5 = 0,4</m:t>
+                    </m:r>
+                  </m:oMath>
+                </a14:m>
+                <a:endParaRPr lang="pt-BR" sz="2200" b="0" dirty="0"/>
+              </a:p>
+              <a:p>
+                <a:pPr>
+                  <a:lnSpc>
+                    <a:spcPct val="150000"/>
+                  </a:lnSpc>
+                </a:pPr>
+                <a14:m>
+                  <m:oMath xmlns:m="http://schemas.openxmlformats.org/officeDocument/2006/math">
+                    <m:r>
+                      <a:rPr lang="pt-BR" sz="2200" b="0" i="1" dirty="0" smtClean="0">
+                        <a:latin typeface="Cambria Math" panose="02040503050406030204" pitchFamily="18" charset="0"/>
+                      </a:rPr>
+                      <m:t>𝑞</m:t>
+                    </m:r>
+                    <m:r>
+                      <a:rPr lang="pt-BR" sz="2200" b="0" i="1" dirty="0" smtClean="0">
+                        <a:latin typeface="Cambria Math" panose="02040503050406030204" pitchFamily="18" charset="0"/>
+                      </a:rPr>
+                      <m:t> = </m:t>
+                    </m:r>
+                    <m:r>
+                      <a:rPr lang="pt-BR" sz="2200" b="0" i="1" dirty="0" smtClean="0">
+                        <a:latin typeface="Cambria Math" panose="02040503050406030204" pitchFamily="18" charset="0"/>
+                      </a:rPr>
+                      <m:t>𝑃</m:t>
+                    </m:r>
+                    <m:r>
+                      <a:rPr lang="pt-BR" sz="2200" b="0" i="1" dirty="0" smtClean="0">
+                        <a:latin typeface="Cambria Math" panose="02040503050406030204" pitchFamily="18" charset="0"/>
+                      </a:rPr>
+                      <m:t>(</m:t>
+                    </m:r>
+                    <m:r>
+                      <a:rPr lang="pt-BR" sz="2200" b="0" i="1" dirty="0" smtClean="0">
+                        <a:latin typeface="Cambria Math" panose="02040503050406030204" pitchFamily="18" charset="0"/>
+                      </a:rPr>
+                      <m:t>𝑋</m:t>
+                    </m:r>
+                    <m:r>
+                      <a:rPr lang="pt-BR" sz="2200" b="0" i="1" dirty="0" smtClean="0">
+                        <a:latin typeface="Cambria Math" panose="02040503050406030204" pitchFamily="18" charset="0"/>
+                      </a:rPr>
+                      <m:t>=0) = 1 − </m:t>
+                    </m:r>
+                    <m:r>
+                      <a:rPr lang="pt-BR" sz="2200" b="0" i="1" dirty="0" smtClean="0">
+                        <a:latin typeface="Cambria Math" panose="02040503050406030204" pitchFamily="18" charset="0"/>
+                      </a:rPr>
+                      <m:t>𝑝</m:t>
+                    </m:r>
+                    <m:r>
+                      <a:rPr lang="pt-BR" sz="2200" b="0" i="1" dirty="0" smtClean="0">
+                        <a:latin typeface="Cambria Math" panose="02040503050406030204" pitchFamily="18" charset="0"/>
+                      </a:rPr>
+                      <m:t> = 30/50 = 3/5 = 0,6</m:t>
+                    </m:r>
+                  </m:oMath>
+                </a14:m>
+                <a:r>
+                  <a:rPr lang="pt-BR" sz="2200" b="0" dirty="0"/>
+                  <a:t> </a:t>
+                </a:r>
+              </a:p>
+              <a:p>
+                <a:pPr marL="342900" indent="-342900">
+                  <a:lnSpc>
+                    <a:spcPct val="150000"/>
+                  </a:lnSpc>
+                  <a:buFont typeface="Arial" panose="020B0604020202020204" pitchFamily="34" charset="0"/>
+                  <a:buChar char="•"/>
+                </a:pPr>
+                <a:r>
+                  <a:rPr lang="pt-BR" sz="2200" b="0" dirty="0"/>
+                  <a:t>Função de probabilidade P(X):</a:t>
+                </a:r>
+              </a:p>
+              <a:p>
+                <a:pPr>
+                  <a:lnSpc>
+                    <a:spcPct val="150000"/>
+                  </a:lnSpc>
+                </a:pPr>
+                <a:endParaRPr lang="pt-BR" sz="2200" b="0" dirty="0"/>
+              </a:p>
+              <a:p>
+                <a:pPr>
+                  <a:lnSpc>
+                    <a:spcPct val="150000"/>
+                  </a:lnSpc>
+                </a:pPr>
+                <a:endParaRPr lang="pt-BR" sz="2200" b="0" dirty="0"/>
+              </a:p>
+              <a:p>
+                <a:pPr marL="342900" indent="-342900">
+                  <a:lnSpc>
+                    <a:spcPct val="150000"/>
+                  </a:lnSpc>
+                  <a:buFont typeface="Arial" panose="020B0604020202020204" pitchFamily="34" charset="0"/>
+                  <a:buChar char="•"/>
+                </a:pPr>
+                <a:endParaRPr lang="pt-BR" sz="2200" b="0" dirty="0"/>
+              </a:p>
+              <a:p>
+                <a:pPr marL="342900" indent="-342900">
+                  <a:lnSpc>
+                    <a:spcPct val="150000"/>
+                  </a:lnSpc>
+                  <a:buFont typeface="Arial" panose="020B0604020202020204" pitchFamily="34" charset="0"/>
+                  <a:buChar char="•"/>
+                </a:pPr>
+                <a:r>
+                  <a:rPr lang="pt-BR" sz="2200" b="0" dirty="0"/>
+                  <a:t>Esperança:</a:t>
+                </a:r>
+              </a:p>
+              <a:p>
+                <a:pPr>
+                  <a:lnSpc>
+                    <a:spcPct val="150000"/>
+                  </a:lnSpc>
+                </a:pPr>
+                <a14:m>
+                  <m:oMathPara xmlns:m="http://schemas.openxmlformats.org/officeDocument/2006/math">
+                    <m:oMathParaPr>
+                      <m:jc m:val="centerGroup"/>
+                    </m:oMathParaPr>
+                    <m:oMath xmlns:m="http://schemas.openxmlformats.org/officeDocument/2006/math">
+                      <m:r>
+                        <a:rPr lang="pt-BR" sz="2200" b="0" i="1" dirty="0" smtClean="0">
+                          <a:latin typeface="Cambria Math" panose="02040503050406030204" pitchFamily="18" charset="0"/>
+                        </a:rPr>
+                        <m:t>𝐸</m:t>
+                      </m:r>
+                      <m:r>
+                        <a:rPr lang="pt-BR" sz="2200" b="0" i="1" dirty="0" smtClean="0">
+                          <a:latin typeface="Cambria Math" panose="02040503050406030204" pitchFamily="18" charset="0"/>
+                        </a:rPr>
+                        <m:t>(</m:t>
+                      </m:r>
+                      <m:r>
+                        <a:rPr lang="pt-BR" sz="2200" b="0" i="1" dirty="0" smtClean="0">
+                          <a:latin typeface="Cambria Math" panose="02040503050406030204" pitchFamily="18" charset="0"/>
+                        </a:rPr>
+                        <m:t>𝑋</m:t>
+                      </m:r>
+                      <m:r>
+                        <a:rPr lang="pt-BR" sz="2200" b="0" i="1" dirty="0" smtClean="0">
+                          <a:latin typeface="Cambria Math" panose="02040503050406030204" pitchFamily="18" charset="0"/>
+                        </a:rPr>
+                        <m:t>) = </m:t>
+                      </m:r>
+                      <m:r>
+                        <a:rPr lang="pt-BR" sz="2200" b="0" i="1" dirty="0" smtClean="0">
+                          <a:latin typeface="Cambria Math" panose="02040503050406030204" pitchFamily="18" charset="0"/>
+                        </a:rPr>
+                        <m:t>𝑝</m:t>
+                      </m:r>
+                      <m:r>
+                        <a:rPr lang="pt-BR" sz="2200" b="0" i="1" dirty="0" smtClean="0">
+                          <a:latin typeface="Cambria Math" panose="02040503050406030204" pitchFamily="18" charset="0"/>
+                        </a:rPr>
+                        <m:t> = 0,4</m:t>
+                      </m:r>
+                    </m:oMath>
+                  </m:oMathPara>
+                </a14:m>
+                <a:endParaRPr lang="pt-BR" sz="2200" b="0" dirty="0"/>
+              </a:p>
+              <a:p>
+                <a:pPr marL="342900" indent="-342900">
+                  <a:lnSpc>
+                    <a:spcPct val="150000"/>
+                  </a:lnSpc>
+                  <a:buFont typeface="Arial" panose="020B0604020202020204" pitchFamily="34" charset="0"/>
+                  <a:buChar char="•"/>
+                </a:pPr>
+                <a:r>
+                  <a:rPr lang="pt-BR" sz="2200" b="0" dirty="0"/>
+                  <a:t>Variância:</a:t>
+                </a:r>
+              </a:p>
+              <a:p>
+                <a:pPr>
+                  <a:lnSpc>
+                    <a:spcPct val="150000"/>
+                  </a:lnSpc>
+                </a:pPr>
+                <a14:m>
+                  <m:oMathPara xmlns:m="http://schemas.openxmlformats.org/officeDocument/2006/math">
+                    <m:oMathParaPr>
+                      <m:jc m:val="centerGroup"/>
+                    </m:oMathParaPr>
+                    <m:oMath xmlns:m="http://schemas.openxmlformats.org/officeDocument/2006/math">
+                      <m:r>
+                        <a:rPr lang="pt-BR" sz="2200" b="0" i="1" dirty="0" smtClean="0">
+                          <a:latin typeface="Cambria Math" panose="02040503050406030204" pitchFamily="18" charset="0"/>
+                        </a:rPr>
+                        <m:t>𝑉𝑎𝑟</m:t>
+                      </m:r>
+                      <m:r>
+                        <a:rPr lang="pt-BR" sz="2200" b="0" i="1" dirty="0" smtClean="0">
+                          <a:latin typeface="Cambria Math" panose="02040503050406030204" pitchFamily="18" charset="0"/>
+                        </a:rPr>
+                        <m:t>(</m:t>
+                      </m:r>
+                      <m:r>
+                        <a:rPr lang="pt-BR" sz="2200" b="0" i="1" dirty="0" smtClean="0">
+                          <a:latin typeface="Cambria Math" panose="02040503050406030204" pitchFamily="18" charset="0"/>
+                        </a:rPr>
+                        <m:t>𝑋</m:t>
+                      </m:r>
+                      <m:r>
+                        <a:rPr lang="pt-BR" sz="2200" b="0" i="1" dirty="0" smtClean="0">
+                          <a:latin typeface="Cambria Math" panose="02040503050406030204" pitchFamily="18" charset="0"/>
+                        </a:rPr>
+                        <m:t>) = </m:t>
+                      </m:r>
+                      <m:r>
+                        <a:rPr lang="pt-BR" sz="2200" b="0" i="1" dirty="0" smtClean="0">
+                          <a:latin typeface="Cambria Math" panose="02040503050406030204" pitchFamily="18" charset="0"/>
+                        </a:rPr>
+                        <m:t>𝑝</m:t>
+                      </m:r>
+                      <m:r>
+                        <a:rPr lang="pt-BR" sz="2200" b="0" i="1" dirty="0" smtClean="0">
+                          <a:latin typeface="Cambria Math" panose="02040503050406030204" pitchFamily="18" charset="0"/>
+                        </a:rPr>
+                        <m:t>(1−</m:t>
+                      </m:r>
+                      <m:r>
+                        <a:rPr lang="pt-BR" sz="2200" b="0" i="1" dirty="0" smtClean="0">
+                          <a:latin typeface="Cambria Math" panose="02040503050406030204" pitchFamily="18" charset="0"/>
+                        </a:rPr>
+                        <m:t>𝑝</m:t>
+                      </m:r>
+                      <m:r>
+                        <a:rPr lang="pt-BR" sz="2200" b="0" i="1" dirty="0" smtClean="0">
+                          <a:latin typeface="Cambria Math" panose="02040503050406030204" pitchFamily="18" charset="0"/>
+                        </a:rPr>
+                        <m:t>) = </m:t>
+                      </m:r>
+                      <m:r>
+                        <a:rPr lang="pt-BR" sz="2200" b="0" i="1" dirty="0" err="1">
+                          <a:latin typeface="Cambria Math" panose="02040503050406030204" pitchFamily="18" charset="0"/>
+                        </a:rPr>
+                        <m:t>𝑝</m:t>
+                      </m:r>
+                      <m:r>
+                        <a:rPr lang="pt-BR" sz="2200" b="0" i="1" dirty="0" err="1">
+                          <a:latin typeface="Cambria Math" panose="02040503050406030204" pitchFamily="18" charset="0"/>
+                        </a:rPr>
+                        <m:t>·</m:t>
+                      </m:r>
+                      <m:r>
+                        <a:rPr lang="pt-BR" sz="2200" b="0" i="1" dirty="0" err="1">
+                          <a:latin typeface="Cambria Math" panose="02040503050406030204" pitchFamily="18" charset="0"/>
+                        </a:rPr>
+                        <m:t>𝑞</m:t>
+                      </m:r>
+                      <m:r>
+                        <a:rPr lang="pt-BR" sz="2200" b="0" i="1" dirty="0">
+                          <a:latin typeface="Cambria Math" panose="02040503050406030204" pitchFamily="18" charset="0"/>
+                        </a:rPr>
+                        <m:t> = 0,4 × 0,6 = 0,24</m:t>
+                      </m:r>
+                    </m:oMath>
+                  </m:oMathPara>
+                </a14:m>
+                <a:endParaRPr lang="pt-BR" sz="2200" b="0" dirty="0"/>
+              </a:p>
+            </p:txBody>
+          </p:sp>
+        </mc:Choice>
+        <mc:Fallback xmlns="">
+          <p:sp>
+            <p:nvSpPr>
+              <p:cNvPr id="6" name="CaixaDeTexto 5">
+                <a:extLst>
+                  <a:ext uri="{FF2B5EF4-FFF2-40B4-BE49-F238E27FC236}">
+                    <a16:creationId xmlns:a16="http://schemas.microsoft.com/office/drawing/2014/main" id="{720B10DA-C761-4DEE-8D86-E170E1C2E981}"/>
+                  </a:ext>
+                </a:extLst>
+              </p:cNvPr>
+              <p:cNvSpPr txBox="1">
+                <a:spLocks noRot="1" noChangeAspect="1" noMove="1" noResize="1" noEditPoints="1" noAdjustHandles="1" noChangeArrowheads="1" noChangeShapeType="1" noTextEdit="1"/>
+              </p:cNvSpPr>
+              <p:nvPr/>
+            </p:nvSpPr>
+            <p:spPr>
+              <a:xfrm>
+                <a:off x="669652" y="649940"/>
+                <a:ext cx="10067277" cy="5678478"/>
+              </a:xfrm>
+              <a:prstGeom prst="rect">
+                <a:avLst/>
+              </a:prstGeom>
+              <a:blipFill>
+                <a:blip r:embed="rId2"/>
+                <a:stretch>
+                  <a:fillRect l="-727"/>
+                </a:stretch>
+              </a:blipFill>
+            </p:spPr>
+            <p:txBody>
+              <a:bodyPr/>
+              <a:lstStyle/>
+              <a:p>
+                <a:r>
+                  <a:rPr lang="pt-BR">
+                    <a:noFill/>
+                  </a:rPr>
+                  <a:t> </a:t>
+                </a:r>
+              </a:p>
+            </p:txBody>
+          </p:sp>
+        </mc:Fallback>
+      </mc:AlternateContent>
+      <p:sp>
+        <p:nvSpPr>
+          <p:cNvPr id="3" name="CaixaDeTexto 2">
+            <a:extLst>
+              <a:ext uri="{FF2B5EF4-FFF2-40B4-BE49-F238E27FC236}">
+                <a16:creationId xmlns:a16="http://schemas.microsoft.com/office/drawing/2014/main" id="{19131A04-B5D6-4211-8B49-4615DE5797E9}"/>
+              </a:ext>
+            </a:extLst>
+          </p:cNvPr>
+          <p:cNvSpPr txBox="1"/>
+          <p:nvPr/>
+        </p:nvSpPr>
+        <p:spPr>
+          <a:xfrm>
+            <a:off x="361395" y="6488668"/>
+            <a:ext cx="7620000" cy="300210"/>
+          </a:xfrm>
+          <a:prstGeom prst="rect">
+            <a:avLst/>
+          </a:prstGeom>
+          <a:noFill/>
+        </p:spPr>
+        <p:txBody>
+          <a:bodyPr wrap="none" rtlCol="0">
+            <a:spAutoFit/>
+          </a:bodyPr>
+          <a:lstStyle/>
+          <a:p>
+            <a:r>
+              <a:rPr lang="pt-BR" sz="1351" dirty="0"/>
+              <a:t>CEA055 - Estatística e Probabilidade - Professor: Marcos Goulart Lima</a:t>
+            </a:r>
+          </a:p>
+        </p:txBody>
+      </p:sp>
+      <p:graphicFrame>
+        <p:nvGraphicFramePr>
+          <p:cNvPr id="7" name="Tabela distribuicao"/>
+          <p:cNvGraphicFramePr>
+            <a:graphicFrameLocks noGrp="1"/>
+          </p:cNvGraphicFramePr>
+          <p:nvPr>
+            <p:extLst>
+              <p:ext uri="{D42A27DB-BD31-4B8C-83A1-F6EECF244321}">
+                <p14:modId xmlns:p14="http://schemas.microsoft.com/office/powerpoint/2010/main" val="750543979"/>
+              </p:ext>
+            </p:extLst>
+          </p:nvPr>
+        </p:nvGraphicFramePr>
+        <p:xfrm>
+          <a:off x="1093305" y="2921000"/>
+          <a:ext cx="4412973" cy="1016000"/>
+        </p:xfrm>
+        <a:graphic>
+          <a:graphicData uri="http://schemas.openxmlformats.org/drawingml/2006/table">
+            <a:tbl>
+              <a:tblPr firstRow="1"/>
+              <a:tblGrid>
+                <a:gridCol w="1186283">
+                  <a:extLst>
+                    <a:ext uri="{9D8B030D-6E8A-4147-A177-3AD203B41FA5}">
+                      <a16:colId xmlns:a16="http://schemas.microsoft.com/office/drawing/2014/main" val="20000"/>
+                    </a:ext>
+                  </a:extLst>
+                </a:gridCol>
+                <a:gridCol w="1613345">
+                  <a:extLst>
+                    <a:ext uri="{9D8B030D-6E8A-4147-A177-3AD203B41FA5}">
+                      <a16:colId xmlns:a16="http://schemas.microsoft.com/office/drawing/2014/main" val="20001"/>
+                    </a:ext>
+                  </a:extLst>
+                </a:gridCol>
+                <a:gridCol w="1613345">
+                  <a:extLst>
+                    <a:ext uri="{9D8B030D-6E8A-4147-A177-3AD203B41FA5}">
+                      <a16:colId xmlns:a16="http://schemas.microsoft.com/office/drawing/2014/main" val="20002"/>
+                    </a:ext>
+                  </a:extLst>
+                </a:gridCol>
+              </a:tblGrid>
+              <a:tr h="508000">
+                <a:tc>
+                  <a:txBody>
+                    <a:bodyPr/>
+                    <a:lstStyle/>
+                    <a:p>
+                      <a:pPr algn="l"/>
+                      <a:r>
+                        <a:rPr lang="pt-BR" sz="2400" b="1" dirty="0"/>
+                        <a:t>x</a:t>
+                      </a:r>
+                    </a:p>
+                  </a:txBody>
+                  <a:tcPr anchor="ctr">
+                    <a:lnL w="12700" cap="flat" cmpd="sng" algn="ctr">
+                      <a:solidFill>
+                        <a:schemeClr val="tx1"/>
+                      </a:solidFill>
+                      <a:prstDash val="solid"/>
+                      <a:round/>
+                      <a:headEnd type="none" w="med" len="med"/>
+                      <a:tailEnd type="none" w="med" len="med"/>
+                    </a:lnL>
+                    <a:lnR w="12700" cap="flat" cmpd="sng" algn="ctr">
+                      <a:solidFill>
+                        <a:schemeClr val="tx1"/>
+                      </a:solidFill>
+                      <a:prstDash val="solid"/>
+                      <a:round/>
+                      <a:headEnd type="none" w="med" len="med"/>
+                      <a:tailEnd type="none" w="med" len="med"/>
+                    </a:lnR>
+                    <a:lnT w="12700" cap="flat" cmpd="sng" algn="ctr">
+                      <a:solidFill>
+                        <a:schemeClr val="tx1"/>
+                      </a:solidFill>
+                      <a:prstDash val="solid"/>
+                      <a:round/>
+                      <a:headEnd type="none" w="med" len="med"/>
+                      <a:tailEnd type="none" w="med" len="med"/>
+                    </a:lnT>
+                    <a:lnB w="12700" cap="flat" cmpd="sng" algn="ctr">
+                      <a:solidFill>
+                        <a:schemeClr val="tx1"/>
+                      </a:solidFill>
+                      <a:prstDash val="solid"/>
+                      <a:round/>
+                      <a:headEnd type="none" w="med" len="med"/>
+                      <a:tailEnd type="none" w="med" len="med"/>
+                    </a:lnB>
+                    <a:noFill/>
+                  </a:tcPr>
+                </a:tc>
+                <a:tc>
+                  <a:txBody>
+                    <a:bodyPr/>
+                    <a:lstStyle/>
+                    <a:p>
+                      <a:pPr algn="ctr"/>
+                      <a:r>
+                        <a:rPr lang="pt-BR" sz="2400" b="1" dirty="0"/>
+                        <a:t>0</a:t>
+                      </a:r>
+                    </a:p>
+                  </a:txBody>
+                  <a:tcPr anchor="ctr">
+                    <a:lnL w="12700" cap="flat" cmpd="sng" algn="ctr">
+                      <a:solidFill>
+                        <a:schemeClr val="tx1"/>
+                      </a:solidFill>
+                      <a:prstDash val="solid"/>
+                      <a:round/>
+                      <a:headEnd type="none" w="med" len="med"/>
+                      <a:tailEnd type="none" w="med" len="med"/>
+                    </a:lnL>
+                    <a:lnR w="12700" cap="flat" cmpd="sng" algn="ctr">
+                      <a:solidFill>
+                        <a:schemeClr val="tx1"/>
+                      </a:solidFill>
+                      <a:prstDash val="solid"/>
+                      <a:round/>
+                      <a:headEnd type="none" w="med" len="med"/>
+                      <a:tailEnd type="none" w="med" len="med"/>
+                    </a:lnR>
+                    <a:lnT w="12700" cap="flat" cmpd="sng" algn="ctr">
+                      <a:solidFill>
+                        <a:schemeClr val="tx1"/>
+                      </a:solidFill>
+                      <a:prstDash val="solid"/>
+                      <a:round/>
+                      <a:headEnd type="none" w="med" len="med"/>
+                      <a:tailEnd type="none" w="med" len="med"/>
+                    </a:lnT>
+                    <a:lnB w="12700" cap="flat" cmpd="sng" algn="ctr">
+                      <a:solidFill>
+                        <a:schemeClr val="tx1"/>
+                      </a:solidFill>
+                      <a:prstDash val="solid"/>
+                      <a:round/>
+                      <a:headEnd type="none" w="med" len="med"/>
+                      <a:tailEnd type="none" w="med" len="med"/>
+                    </a:lnB>
+                    <a:noFill/>
+                  </a:tcPr>
+                </a:tc>
+                <a:tc>
+                  <a:txBody>
+                    <a:bodyPr/>
+                    <a:lstStyle/>
+                    <a:p>
+                      <a:pPr algn="ctr"/>
+                      <a:r>
+                        <a:rPr lang="pt-BR" sz="2400" b="1" dirty="0"/>
+                        <a:t>1</a:t>
+                      </a:r>
+                    </a:p>
+                  </a:txBody>
+                  <a:tcPr anchor="ctr">
+                    <a:lnL w="12700" cap="flat" cmpd="sng" algn="ctr">
+                      <a:solidFill>
+                        <a:schemeClr val="tx1"/>
+                      </a:solidFill>
+                      <a:prstDash val="solid"/>
+                      <a:round/>
+                      <a:headEnd type="none" w="med" len="med"/>
+                      <a:tailEnd type="none" w="med" len="med"/>
+                    </a:lnL>
+                    <a:lnR w="12700" cap="flat" cmpd="sng" algn="ctr">
+                      <a:solidFill>
+                        <a:schemeClr val="tx1"/>
+                      </a:solidFill>
+                      <a:prstDash val="solid"/>
+                      <a:round/>
+                      <a:headEnd type="none" w="med" len="med"/>
+                      <a:tailEnd type="none" w="med" len="med"/>
+                    </a:lnR>
+                    <a:lnT w="12700" cap="flat" cmpd="sng" algn="ctr">
+                      <a:solidFill>
+                        <a:schemeClr val="tx1"/>
+                      </a:solidFill>
+                      <a:prstDash val="solid"/>
+                      <a:round/>
+                      <a:headEnd type="none" w="med" len="med"/>
+                      <a:tailEnd type="none" w="med" len="med"/>
+                    </a:lnT>
+                    <a:lnB w="12700" cap="flat" cmpd="sng" algn="ctr">
+                      <a:solidFill>
+                        <a:schemeClr val="tx1"/>
+                      </a:solidFill>
+                      <a:prstDash val="solid"/>
+                      <a:round/>
+                      <a:headEnd type="none" w="med" len="med"/>
+                      <a:tailEnd type="none" w="med" len="med"/>
+                    </a:lnB>
+                    <a:noFill/>
+                  </a:tcPr>
+                </a:tc>
+                <a:extLst>
+                  <a:ext uri="{0D108BD9-81ED-4DB2-BD59-A6C34878D82A}">
+                    <a16:rowId xmlns:a16="http://schemas.microsoft.com/office/drawing/2014/main" val="10000"/>
+                  </a:ext>
+                </a:extLst>
+              </a:tr>
+              <a:tr h="508000">
+                <a:tc>
+                  <a:txBody>
+                    <a:bodyPr/>
+                    <a:lstStyle/>
+                    <a:p>
+                      <a:pPr algn="l"/>
+                      <a:r>
+                        <a:rPr lang="pt-BR" sz="2400" b="1" dirty="0"/>
+                        <a:t>P(X = x)</a:t>
+                      </a:r>
+                    </a:p>
+                  </a:txBody>
+                  <a:tcPr anchor="ctr">
+                    <a:lnL w="12700" cap="flat" cmpd="sng" algn="ctr">
+                      <a:solidFill>
+                        <a:schemeClr val="tx1"/>
+                      </a:solidFill>
+                      <a:prstDash val="solid"/>
+                      <a:round/>
+                      <a:headEnd type="none" w="med" len="med"/>
+                      <a:tailEnd type="none" w="med" len="med"/>
+                    </a:lnL>
+                    <a:lnR w="12700" cap="flat" cmpd="sng" algn="ctr">
+                      <a:solidFill>
+                        <a:schemeClr val="tx1"/>
+                      </a:solidFill>
+                      <a:prstDash val="solid"/>
+                      <a:round/>
+                      <a:headEnd type="none" w="med" len="med"/>
+                      <a:tailEnd type="none" w="med" len="med"/>
+                    </a:lnR>
+                    <a:lnT w="12700" cap="flat" cmpd="sng" algn="ctr">
+                      <a:solidFill>
+                        <a:schemeClr val="tx1"/>
+                      </a:solidFill>
+                      <a:prstDash val="solid"/>
+                      <a:round/>
+                      <a:headEnd type="none" w="med" len="med"/>
+                      <a:tailEnd type="none" w="med" len="med"/>
+                    </a:lnT>
+                    <a:lnB w="12700" cap="flat" cmpd="sng" algn="ctr">
+                      <a:solidFill>
+                        <a:schemeClr val="tx1"/>
+                      </a:solidFill>
+                      <a:prstDash val="solid"/>
+                      <a:round/>
+                      <a:headEnd type="none" w="med" len="med"/>
+                      <a:tailEnd type="none" w="med" len="med"/>
+                    </a:lnB>
+                    <a:noFill/>
+                  </a:tcPr>
+                </a:tc>
+                <a:tc>
+                  <a:txBody>
+                    <a:bodyPr/>
+                    <a:lstStyle/>
+                    <a:p>
+                      <a:pPr algn="ctr"/>
+                      <a:r>
+                        <a:rPr lang="pt-BR" sz="2400" dirty="0"/>
+                        <a:t>0,6</a:t>
+                      </a:r>
+                    </a:p>
+                  </a:txBody>
+                  <a:tcPr anchor="ctr">
+                    <a:lnL w="12700" cap="flat" cmpd="sng" algn="ctr">
+                      <a:solidFill>
+                        <a:schemeClr val="tx1"/>
+                      </a:solidFill>
+                      <a:prstDash val="solid"/>
+                      <a:round/>
+                      <a:headEnd type="none" w="med" len="med"/>
+                      <a:tailEnd type="none" w="med" len="med"/>
+                    </a:lnL>
+                    <a:lnR w="12700" cap="flat" cmpd="sng" algn="ctr">
+                      <a:solidFill>
+                        <a:schemeClr val="tx1"/>
+                      </a:solidFill>
+                      <a:prstDash val="solid"/>
+                      <a:round/>
+                      <a:headEnd type="none" w="med" len="med"/>
+                      <a:tailEnd type="none" w="med" len="med"/>
+                    </a:lnR>
+                    <a:lnT w="12700" cap="flat" cmpd="sng" algn="ctr">
+                      <a:solidFill>
+                        <a:schemeClr val="tx1"/>
+                      </a:solidFill>
+                      <a:prstDash val="solid"/>
+                      <a:round/>
+                      <a:headEnd type="none" w="med" len="med"/>
+                      <a:tailEnd type="none" w="med" len="med"/>
+                    </a:lnT>
+                    <a:lnB w="12700" cap="flat" cmpd="sng" algn="ctr">
+                      <a:solidFill>
+                        <a:schemeClr val="tx1"/>
+                      </a:solidFill>
+                      <a:prstDash val="solid"/>
+                      <a:round/>
+                      <a:headEnd type="none" w="med" len="med"/>
+                      <a:tailEnd type="none" w="med" len="med"/>
+                    </a:lnB>
+                    <a:noFill/>
+                  </a:tcPr>
+                </a:tc>
+                <a:tc>
+                  <a:txBody>
+                    <a:bodyPr/>
+                    <a:lstStyle/>
+                    <a:p>
+                      <a:pPr algn="ctr"/>
+                      <a:r>
+                        <a:rPr lang="pt-BR" sz="2400" dirty="0"/>
+                        <a:t>0,4</a:t>
+                      </a:r>
+                    </a:p>
+                  </a:txBody>
+                  <a:tcPr anchor="ctr">
+                    <a:lnL w="12700" cap="flat" cmpd="sng" algn="ctr">
+                      <a:solidFill>
+                        <a:schemeClr val="tx1"/>
+                      </a:solidFill>
+                      <a:prstDash val="solid"/>
+                      <a:round/>
+                      <a:headEnd type="none" w="med" len="med"/>
+                      <a:tailEnd type="none" w="med" len="med"/>
+                    </a:lnL>
+                    <a:lnR w="12700" cap="flat" cmpd="sng" algn="ctr">
+                      <a:solidFill>
+                        <a:schemeClr val="tx1"/>
+                      </a:solidFill>
+                      <a:prstDash val="solid"/>
+                      <a:round/>
+                      <a:headEnd type="none" w="med" len="med"/>
+                      <a:tailEnd type="none" w="med" len="med"/>
+                    </a:lnR>
+                    <a:lnT w="12700" cap="flat" cmpd="sng" algn="ctr">
+                      <a:solidFill>
+                        <a:schemeClr val="tx1"/>
+                      </a:solidFill>
+                      <a:prstDash val="solid"/>
+                      <a:round/>
+                      <a:headEnd type="none" w="med" len="med"/>
+                      <a:tailEnd type="none" w="med" len="med"/>
+                    </a:lnT>
+                    <a:lnB w="12700" cap="flat" cmpd="sng" algn="ctr">
+                      <a:solidFill>
+                        <a:schemeClr val="tx1"/>
+                      </a:solidFill>
+                      <a:prstDash val="solid"/>
+                      <a:round/>
+                      <a:headEnd type="none" w="med" len="med"/>
+                      <a:tailEnd type="none" w="med" len="med"/>
+                    </a:lnB>
+                    <a:noFill/>
+                  </a:tcPr>
+                </a:tc>
+                <a:extLst>
+                  <a:ext uri="{0D108BD9-81ED-4DB2-BD59-A6C34878D82A}">
+                    <a16:rowId xmlns:a16="http://schemas.microsoft.com/office/drawing/2014/main" val="10001"/>
+                  </a:ext>
+                </a:extLst>
+              </a:tr>
+            </a:tbl>
+          </a:graphicData>
+        </a:graphic>
+      </p:graphicFrame>
+    </p:spTree>
+    <p:extLst>
+      <p:ext uri="{BB962C8B-B14F-4D97-AF65-F5344CB8AC3E}">
+        <p14:creationId xmlns:p14="http://schemas.microsoft.com/office/powerpoint/2010/main" val="4158213510"/>
       </p:ext>
     </p:extLst>
   </p:cSld>
